--- a/chapter5/chapter5.pptx
+++ b/chapter5/chapter5.pptx
@@ -10932,10 +10932,12 @@
           </a:bodyPr>
           <a:lstStyle/>
           <a:p>
-            <a:pPr>
-              <a:spcAft>
-                <a:spcPts val="1000"/>
-              </a:spcAft>
+            <a:pPr lvl="0" marL="457200" indent="-228600">
+              <a:buFont typeface="Calibri"/>
+              <a:spcAft>
+                <a:spcPts val="1000"/>
+              </a:spcAft>
+              <a:buSzPct val="100000"/>
               <a:buChar char="•"/>
               <a:lnSpc>
                 <a:spcPts val="2200"/>
@@ -10952,10 +10954,12 @@
             </a:r>
           </a:p>
           <a:p>
-            <a:pPr>
-              <a:spcAft>
-                <a:spcPts val="1000"/>
-              </a:spcAft>
+            <a:pPr lvl="0" marL="457200" indent="-228600">
+              <a:buFont typeface="Calibri"/>
+              <a:spcAft>
+                <a:spcPts val="1000"/>
+              </a:spcAft>
+              <a:buSzPct val="100000"/>
               <a:buChar char="•"/>
               <a:lnSpc>
                 <a:spcPts val="2200"/>
@@ -11091,10 +11095,12 @@
           </a:bodyPr>
           <a:lstStyle/>
           <a:p>
-            <a:pPr>
-              <a:spcAft>
-                <a:spcPts val="1000"/>
-              </a:spcAft>
+            <a:pPr lvl="0" marL="457200" indent="-228600">
+              <a:buFont typeface="Calibri"/>
+              <a:spcAft>
+                <a:spcPts val="1000"/>
+              </a:spcAft>
+              <a:buSzPct val="100000"/>
               <a:buChar char="•"/>
               <a:lnSpc>
                 <a:spcPts val="2200"/>
@@ -11111,10 +11117,12 @@
             </a:r>
           </a:p>
           <a:p>
-            <a:pPr>
-              <a:spcAft>
-                <a:spcPts val="1000"/>
-              </a:spcAft>
+            <a:pPr lvl="0" marL="457200" indent="-228600">
+              <a:buFont typeface="Calibri"/>
+              <a:spcAft>
+                <a:spcPts val="1000"/>
+              </a:spcAft>
+              <a:buSzPct val="100000"/>
               <a:buChar char="•"/>
               <a:lnSpc>
                 <a:spcPts val="2200"/>
@@ -11131,10 +11139,12 @@
             </a:r>
           </a:p>
           <a:p>
-            <a:pPr>
-              <a:spcAft>
-                <a:spcPts val="1000"/>
-              </a:spcAft>
+            <a:pPr lvl="0" marL="457200" indent="-228600">
+              <a:buFont typeface="Calibri"/>
+              <a:spcAft>
+                <a:spcPts val="1000"/>
+              </a:spcAft>
+              <a:buSzPct val="100000"/>
               <a:buChar char="•"/>
               <a:lnSpc>
                 <a:spcPts val="2200"/>
@@ -11151,10 +11161,12 @@
             </a:r>
           </a:p>
           <a:p>
-            <a:pPr>
-              <a:spcAft>
-                <a:spcPts val="1000"/>
-              </a:spcAft>
+            <a:pPr lvl="0" marL="457200" indent="-228600">
+              <a:buFont typeface="Calibri"/>
+              <a:spcAft>
+                <a:spcPts val="1000"/>
+              </a:spcAft>
+              <a:buSzPct val="100000"/>
               <a:buChar char="•"/>
               <a:lnSpc>
                 <a:spcPts val="2200"/>
@@ -11290,10 +11302,12 @@
           </a:bodyPr>
           <a:lstStyle/>
           <a:p>
-            <a:pPr>
-              <a:spcAft>
-                <a:spcPts val="1000"/>
-              </a:spcAft>
+            <a:pPr lvl="0" marL="457200" indent="-228600">
+              <a:buFont typeface="Calibri"/>
+              <a:spcAft>
+                <a:spcPts val="1000"/>
+              </a:spcAft>
+              <a:buSzPct val="100000"/>
               <a:buChar char="•"/>
               <a:lnSpc>
                 <a:spcPts val="2200"/>
@@ -11310,10 +11324,12 @@
             </a:r>
           </a:p>
           <a:p>
-            <a:pPr>
-              <a:spcAft>
-                <a:spcPts val="1000"/>
-              </a:spcAft>
+            <a:pPr lvl="0" marL="457200" indent="-228600">
+              <a:buFont typeface="Calibri"/>
+              <a:spcAft>
+                <a:spcPts val="1000"/>
+              </a:spcAft>
+              <a:buSzPct val="100000"/>
               <a:buChar char="•"/>
               <a:lnSpc>
                 <a:spcPts val="2200"/>
@@ -11330,10 +11346,12 @@
             </a:r>
           </a:p>
           <a:p>
-            <a:pPr>
-              <a:spcAft>
-                <a:spcPts val="1000"/>
-              </a:spcAft>
+            <a:pPr lvl="0" marL="457200" indent="-228600">
+              <a:buFont typeface="Calibri"/>
+              <a:spcAft>
+                <a:spcPts val="1000"/>
+              </a:spcAft>
+              <a:buSzPct val="100000"/>
               <a:buChar char="•"/>
               <a:lnSpc>
                 <a:spcPts val="2200"/>
@@ -11350,10 +11368,12 @@
             </a:r>
           </a:p>
           <a:p>
-            <a:pPr>
-              <a:spcAft>
-                <a:spcPts val="1000"/>
-              </a:spcAft>
+            <a:pPr lvl="0" marL="457200" indent="-228600">
+              <a:buFont typeface="Calibri"/>
+              <a:spcAft>
+                <a:spcPts val="1000"/>
+              </a:spcAft>
+              <a:buSzPct val="100000"/>
               <a:buChar char="•"/>
               <a:lnSpc>
                 <a:spcPts val="2200"/>
@@ -11489,10 +11509,12 @@
           </a:bodyPr>
           <a:lstStyle/>
           <a:p>
-            <a:pPr>
-              <a:spcAft>
-                <a:spcPts val="1000"/>
-              </a:spcAft>
+            <a:pPr lvl="0" marL="457200" indent="-228600">
+              <a:buFont typeface="Calibri"/>
+              <a:spcAft>
+                <a:spcPts val="1000"/>
+              </a:spcAft>
+              <a:buSzPct val="100000"/>
               <a:buChar char="•"/>
               <a:lnSpc>
                 <a:spcPts val="2200"/>
@@ -11509,10 +11531,12 @@
             </a:r>
           </a:p>
           <a:p>
-            <a:pPr>
-              <a:spcAft>
-                <a:spcPts val="1000"/>
-              </a:spcAft>
+            <a:pPr lvl="0" marL="457200" indent="-228600">
+              <a:buFont typeface="Calibri"/>
+              <a:spcAft>
+                <a:spcPts val="1000"/>
+              </a:spcAft>
+              <a:buSzPct val="100000"/>
               <a:buChar char="•"/>
               <a:lnSpc>
                 <a:spcPts val="2200"/>
@@ -11648,10 +11672,12 @@
           </a:bodyPr>
           <a:lstStyle/>
           <a:p>
-            <a:pPr>
-              <a:spcAft>
-                <a:spcPts val="1000"/>
-              </a:spcAft>
+            <a:pPr lvl="0" marL="457200" indent="-228600">
+              <a:buFont typeface="Calibri"/>
+              <a:spcAft>
+                <a:spcPts val="1000"/>
+              </a:spcAft>
+              <a:buSzPct val="100000"/>
               <a:buChar char="•"/>
               <a:lnSpc>
                 <a:spcPts val="2200"/>
@@ -11668,10 +11694,12 @@
             </a:r>
           </a:p>
           <a:p>
-            <a:pPr>
-              <a:spcAft>
-                <a:spcPts val="1000"/>
-              </a:spcAft>
+            <a:pPr lvl="0" marL="457200" indent="-228600">
+              <a:buFont typeface="Calibri"/>
+              <a:spcAft>
+                <a:spcPts val="1000"/>
+              </a:spcAft>
+              <a:buSzPct val="100000"/>
               <a:buChar char="•"/>
               <a:lnSpc>
                 <a:spcPts val="2200"/>
@@ -11688,10 +11716,12 @@
             </a:r>
           </a:p>
           <a:p>
-            <a:pPr>
-              <a:spcAft>
-                <a:spcPts val="1000"/>
-              </a:spcAft>
+            <a:pPr lvl="0" marL="457200" indent="-228600">
+              <a:buFont typeface="Calibri"/>
+              <a:spcAft>
+                <a:spcPts val="1000"/>
+              </a:spcAft>
+              <a:buSzPct val="100000"/>
               <a:buChar char="•"/>
               <a:lnSpc>
                 <a:spcPts val="2200"/>
@@ -11708,10 +11738,12 @@
             </a:r>
           </a:p>
           <a:p>
-            <a:pPr>
-              <a:spcAft>
-                <a:spcPts val="1000"/>
-              </a:spcAft>
+            <a:pPr lvl="0" marL="457200" indent="-228600">
+              <a:buFont typeface="Calibri"/>
+              <a:spcAft>
+                <a:spcPts val="1000"/>
+              </a:spcAft>
+              <a:buSzPct val="100000"/>
               <a:buChar char="•"/>
               <a:lnSpc>
                 <a:spcPts val="2200"/>
@@ -11847,10 +11879,12 @@
           </a:bodyPr>
           <a:lstStyle/>
           <a:p>
-            <a:pPr>
-              <a:spcAft>
-                <a:spcPts val="1000"/>
-              </a:spcAft>
+            <a:pPr lvl="0" marL="457200" indent="-228600">
+              <a:buFont typeface="Calibri"/>
+              <a:spcAft>
+                <a:spcPts val="1000"/>
+              </a:spcAft>
+              <a:buSzPct val="100000"/>
               <a:buChar char="•"/>
               <a:lnSpc>
                 <a:spcPts val="2200"/>
@@ -11867,10 +11901,12 @@
             </a:r>
           </a:p>
           <a:p>
-            <a:pPr>
-              <a:spcAft>
-                <a:spcPts val="1000"/>
-              </a:spcAft>
+            <a:pPr lvl="0" marL="457200" indent="-228600">
+              <a:buFont typeface="Calibri"/>
+              <a:spcAft>
+                <a:spcPts val="1000"/>
+              </a:spcAft>
+              <a:buSzPct val="100000"/>
               <a:buChar char="•"/>
               <a:lnSpc>
                 <a:spcPts val="2200"/>
@@ -11887,10 +11923,12 @@
             </a:r>
           </a:p>
           <a:p>
-            <a:pPr>
-              <a:spcAft>
-                <a:spcPts val="1000"/>
-              </a:spcAft>
+            <a:pPr lvl="0" marL="457200" indent="-228600">
+              <a:buFont typeface="Calibri"/>
+              <a:spcAft>
+                <a:spcPts val="1000"/>
+              </a:spcAft>
+              <a:buSzPct val="100000"/>
               <a:buChar char="•"/>
               <a:lnSpc>
                 <a:spcPts val="2200"/>
@@ -12026,10 +12064,12 @@
           </a:bodyPr>
           <a:lstStyle/>
           <a:p>
-            <a:pPr>
-              <a:spcAft>
-                <a:spcPts val="1000"/>
-              </a:spcAft>
+            <a:pPr lvl="0" marL="457200" indent="-228600">
+              <a:buFont typeface="Calibri"/>
+              <a:spcAft>
+                <a:spcPts val="1000"/>
+              </a:spcAft>
+              <a:buSzPct val="100000"/>
               <a:buChar char="•"/>
               <a:lnSpc>
                 <a:spcPts val="2200"/>
@@ -12046,10 +12086,12 @@
             </a:r>
           </a:p>
           <a:p>
-            <a:pPr>
-              <a:spcAft>
-                <a:spcPts val="1000"/>
-              </a:spcAft>
+            <a:pPr lvl="0" marL="457200" indent="-228600">
+              <a:buFont typeface="Calibri"/>
+              <a:spcAft>
+                <a:spcPts val="1000"/>
+              </a:spcAft>
+              <a:buSzPct val="100000"/>
               <a:buChar char="•"/>
               <a:lnSpc>
                 <a:spcPts val="2200"/>
@@ -12066,10 +12108,12 @@
             </a:r>
           </a:p>
           <a:p>
-            <a:pPr>
-              <a:spcAft>
-                <a:spcPts val="1000"/>
-              </a:spcAft>
+            <a:pPr lvl="0" marL="457200" indent="-228600">
+              <a:buFont typeface="Calibri"/>
+              <a:spcAft>
+                <a:spcPts val="1000"/>
+              </a:spcAft>
+              <a:buSzPct val="100000"/>
               <a:buChar char="•"/>
               <a:lnSpc>
                 <a:spcPts val="2200"/>
@@ -12205,10 +12249,12 @@
           </a:bodyPr>
           <a:lstStyle/>
           <a:p>
-            <a:pPr>
-              <a:spcAft>
-                <a:spcPts val="1000"/>
-              </a:spcAft>
+            <a:pPr lvl="0" marL="457200" indent="-228600">
+              <a:buFont typeface="Calibri"/>
+              <a:spcAft>
+                <a:spcPts val="1000"/>
+              </a:spcAft>
+              <a:buSzPct val="100000"/>
               <a:buChar char="•"/>
               <a:lnSpc>
                 <a:spcPts val="2200"/>
@@ -12225,10 +12271,12 @@
             </a:r>
           </a:p>
           <a:p>
-            <a:pPr>
-              <a:spcAft>
-                <a:spcPts val="1000"/>
-              </a:spcAft>
+            <a:pPr lvl="0" marL="457200" indent="-228600">
+              <a:buFont typeface="Calibri"/>
+              <a:spcAft>
+                <a:spcPts val="1000"/>
+              </a:spcAft>
+              <a:buSzPct val="100000"/>
               <a:buChar char="•"/>
               <a:lnSpc>
                 <a:spcPts val="2200"/>
@@ -12364,10 +12412,12 @@
           </a:bodyPr>
           <a:lstStyle/>
           <a:p>
-            <a:pPr>
-              <a:spcAft>
-                <a:spcPts val="1000"/>
-              </a:spcAft>
+            <a:pPr lvl="0" marL="457200" indent="-228600">
+              <a:buFont typeface="Calibri"/>
+              <a:spcAft>
+                <a:spcPts val="1000"/>
+              </a:spcAft>
+              <a:buSzPct val="100000"/>
               <a:buChar char="•"/>
               <a:lnSpc>
                 <a:spcPts val="2200"/>
@@ -12384,10 +12434,12 @@
             </a:r>
           </a:p>
           <a:p>
-            <a:pPr>
-              <a:spcAft>
-                <a:spcPts val="1000"/>
-              </a:spcAft>
+            <a:pPr lvl="0" marL="457200" indent="-228600">
+              <a:buFont typeface="Calibri"/>
+              <a:spcAft>
+                <a:spcPts val="1000"/>
+              </a:spcAft>
+              <a:buSzPct val="100000"/>
               <a:buChar char="•"/>
               <a:lnSpc>
                 <a:spcPts val="2200"/>
@@ -12404,10 +12456,12 @@
             </a:r>
           </a:p>
           <a:p>
-            <a:pPr>
-              <a:spcAft>
-                <a:spcPts val="1000"/>
-              </a:spcAft>
+            <a:pPr lvl="0" marL="457200" indent="-228600">
+              <a:buFont typeface="Calibri"/>
+              <a:spcAft>
+                <a:spcPts val="1000"/>
+              </a:spcAft>
+              <a:buSzPct val="100000"/>
               <a:buChar char="•"/>
               <a:lnSpc>
                 <a:spcPts val="2200"/>
@@ -12543,10 +12597,12 @@
           </a:bodyPr>
           <a:lstStyle/>
           <a:p>
-            <a:pPr>
-              <a:spcAft>
-                <a:spcPts val="1000"/>
-              </a:spcAft>
+            <a:pPr lvl="0" marL="457200" indent="-228600">
+              <a:buFont typeface="Calibri"/>
+              <a:spcAft>
+                <a:spcPts val="1000"/>
+              </a:spcAft>
+              <a:buSzPct val="100000"/>
               <a:buChar char="•"/>
               <a:lnSpc>
                 <a:spcPts val="2200"/>
@@ -12563,10 +12619,12 @@
             </a:r>
           </a:p>
           <a:p>
-            <a:pPr>
-              <a:spcAft>
-                <a:spcPts val="1000"/>
-              </a:spcAft>
+            <a:pPr lvl="0" marL="457200" indent="-228600">
+              <a:buFont typeface="Calibri"/>
+              <a:spcAft>
+                <a:spcPts val="1000"/>
+              </a:spcAft>
+              <a:buSzPct val="100000"/>
               <a:buChar char="•"/>
               <a:lnSpc>
                 <a:spcPts val="2200"/>
@@ -12583,10 +12641,12 @@
             </a:r>
           </a:p>
           <a:p>
-            <a:pPr>
-              <a:spcAft>
-                <a:spcPts val="1000"/>
-              </a:spcAft>
+            <a:pPr lvl="0" marL="457200" indent="-228600">
+              <a:buFont typeface="Calibri"/>
+              <a:spcAft>
+                <a:spcPts val="1000"/>
+              </a:spcAft>
+              <a:buSzPct val="100000"/>
               <a:buChar char="•"/>
               <a:lnSpc>
                 <a:spcPts val="2200"/>
@@ -12722,10 +12782,12 @@
           </a:bodyPr>
           <a:lstStyle/>
           <a:p>
-            <a:pPr>
-              <a:spcAft>
-                <a:spcPts val="1000"/>
-              </a:spcAft>
+            <a:pPr lvl="0" marL="457200" indent="-228600">
+              <a:buFont typeface="Calibri"/>
+              <a:spcAft>
+                <a:spcPts val="1000"/>
+              </a:spcAft>
+              <a:buSzPct val="100000"/>
               <a:buChar char="•"/>
               <a:lnSpc>
                 <a:spcPts val="2200"/>
@@ -12742,10 +12804,12 @@
             </a:r>
           </a:p>
           <a:p>
-            <a:pPr>
-              <a:spcAft>
-                <a:spcPts val="1000"/>
-              </a:spcAft>
+            <a:pPr lvl="0" marL="457200" indent="-228600">
+              <a:buFont typeface="Calibri"/>
+              <a:spcAft>
+                <a:spcPts val="1000"/>
+              </a:spcAft>
+              <a:buSzPct val="100000"/>
               <a:buChar char="•"/>
               <a:lnSpc>
                 <a:spcPts val="2200"/>
@@ -12762,10 +12826,12 @@
             </a:r>
           </a:p>
           <a:p>
-            <a:pPr>
-              <a:spcAft>
-                <a:spcPts val="1000"/>
-              </a:spcAft>
+            <a:pPr lvl="0" marL="457200" indent="-228600">
+              <a:buFont typeface="Calibri"/>
+              <a:spcAft>
+                <a:spcPts val="1000"/>
+              </a:spcAft>
+              <a:buSzPct val="100000"/>
               <a:buChar char="•"/>
               <a:lnSpc>
                 <a:spcPts val="2200"/>
@@ -12901,10 +12967,12 @@
           </a:bodyPr>
           <a:lstStyle/>
           <a:p>
-            <a:pPr>
-              <a:spcAft>
-                <a:spcPts val="1000"/>
-              </a:spcAft>
+            <a:pPr lvl="0" marL="457200" indent="-228600">
+              <a:buFont typeface="Calibri"/>
+              <a:spcAft>
+                <a:spcPts val="1000"/>
+              </a:spcAft>
+              <a:buSzPct val="100000"/>
               <a:buChar char="•"/>
               <a:lnSpc>
                 <a:spcPts val="2200"/>
@@ -12921,10 +12989,12 @@
             </a:r>
           </a:p>
           <a:p>
-            <a:pPr>
-              <a:spcAft>
-                <a:spcPts val="1000"/>
-              </a:spcAft>
+            <a:pPr lvl="0" marL="457200" indent="-228600">
+              <a:buFont typeface="Calibri"/>
+              <a:spcAft>
+                <a:spcPts val="1000"/>
+              </a:spcAft>
+              <a:buSzPct val="100000"/>
               <a:buChar char="•"/>
               <a:lnSpc>
                 <a:spcPts val="2200"/>
@@ -12941,10 +13011,12 @@
             </a:r>
           </a:p>
           <a:p>
-            <a:pPr>
-              <a:spcAft>
-                <a:spcPts val="1000"/>
-              </a:spcAft>
+            <a:pPr lvl="0" marL="457200" indent="-228600">
+              <a:buFont typeface="Calibri"/>
+              <a:spcAft>
+                <a:spcPts val="1000"/>
+              </a:spcAft>
+              <a:buSzPct val="100000"/>
               <a:buChar char="•"/>
               <a:lnSpc>
                 <a:spcPts val="2200"/>
@@ -13080,10 +13152,12 @@
           </a:bodyPr>
           <a:lstStyle/>
           <a:p>
-            <a:pPr>
-              <a:spcAft>
-                <a:spcPts val="1000"/>
-              </a:spcAft>
+            <a:pPr lvl="0" marL="457200" indent="-228600">
+              <a:buFont typeface="Calibri"/>
+              <a:spcAft>
+                <a:spcPts val="1000"/>
+              </a:spcAft>
+              <a:buSzPct val="100000"/>
               <a:buChar char="•"/>
               <a:lnSpc>
                 <a:spcPts val="2200"/>
@@ -13100,10 +13174,12 @@
             </a:r>
           </a:p>
           <a:p>
-            <a:pPr>
-              <a:spcAft>
-                <a:spcPts val="1000"/>
-              </a:spcAft>
+            <a:pPr lvl="0" marL="457200" indent="-228600">
+              <a:buFont typeface="Calibri"/>
+              <a:spcAft>
+                <a:spcPts val="1000"/>
+              </a:spcAft>
+              <a:buSzPct val="100000"/>
               <a:buChar char="•"/>
               <a:lnSpc>
                 <a:spcPts val="2200"/>
@@ -13120,10 +13196,12 @@
             </a:r>
           </a:p>
           <a:p>
-            <a:pPr>
-              <a:spcAft>
-                <a:spcPts val="1000"/>
-              </a:spcAft>
+            <a:pPr lvl="0" marL="457200" indent="-228600">
+              <a:buFont typeface="Calibri"/>
+              <a:spcAft>
+                <a:spcPts val="1000"/>
+              </a:spcAft>
+              <a:buSzPct val="100000"/>
               <a:buChar char="•"/>
               <a:lnSpc>
                 <a:spcPts val="2200"/>
@@ -13140,10 +13218,12 @@
             </a:r>
           </a:p>
           <a:p>
-            <a:pPr>
-              <a:spcAft>
-                <a:spcPts val="1000"/>
-              </a:spcAft>
+            <a:pPr lvl="0" marL="457200" indent="-228600">
+              <a:buFont typeface="Calibri"/>
+              <a:spcAft>
+                <a:spcPts val="1000"/>
+              </a:spcAft>
+              <a:buSzPct val="100000"/>
               <a:buChar char="•"/>
               <a:lnSpc>
                 <a:spcPts val="2200"/>
@@ -13279,10 +13359,12 @@
           </a:bodyPr>
           <a:lstStyle/>
           <a:p>
-            <a:pPr>
-              <a:spcAft>
-                <a:spcPts val="1000"/>
-              </a:spcAft>
+            <a:pPr lvl="0" marL="457200" indent="-228600">
+              <a:buFont typeface="Calibri"/>
+              <a:spcAft>
+                <a:spcPts val="1000"/>
+              </a:spcAft>
+              <a:buSzPct val="100000"/>
               <a:buChar char="•"/>
               <a:lnSpc>
                 <a:spcPts val="2200"/>
@@ -13299,10 +13381,12 @@
             </a:r>
           </a:p>
           <a:p>
-            <a:pPr>
-              <a:spcAft>
-                <a:spcPts val="1000"/>
-              </a:spcAft>
+            <a:pPr lvl="0" marL="457200" indent="-228600">
+              <a:buFont typeface="Calibri"/>
+              <a:spcAft>
+                <a:spcPts val="1000"/>
+              </a:spcAft>
+              <a:buSzPct val="100000"/>
               <a:buChar char="•"/>
               <a:lnSpc>
                 <a:spcPts val="2200"/>
@@ -13319,10 +13403,12 @@
             </a:r>
           </a:p>
           <a:p>
-            <a:pPr>
-              <a:spcAft>
-                <a:spcPts val="1000"/>
-              </a:spcAft>
+            <a:pPr lvl="0" marL="457200" indent="-228600">
+              <a:buFont typeface="Calibri"/>
+              <a:spcAft>
+                <a:spcPts val="1000"/>
+              </a:spcAft>
+              <a:buSzPct val="100000"/>
               <a:buChar char="•"/>
               <a:lnSpc>
                 <a:spcPts val="2200"/>
@@ -13458,10 +13544,12 @@
           </a:bodyPr>
           <a:lstStyle/>
           <a:p>
-            <a:pPr>
-              <a:spcAft>
-                <a:spcPts val="1000"/>
-              </a:spcAft>
+            <a:pPr lvl="0" marL="457200" indent="-228600">
+              <a:buFont typeface="Calibri"/>
+              <a:spcAft>
+                <a:spcPts val="1000"/>
+              </a:spcAft>
+              <a:buSzPct val="100000"/>
               <a:buChar char="•"/>
               <a:lnSpc>
                 <a:spcPts val="2200"/>
@@ -13478,10 +13566,12 @@
             </a:r>
           </a:p>
           <a:p>
-            <a:pPr>
-              <a:spcAft>
-                <a:spcPts val="1000"/>
-              </a:spcAft>
+            <a:pPr lvl="0" marL="457200" indent="-228600">
+              <a:buFont typeface="Calibri"/>
+              <a:spcAft>
+                <a:spcPts val="1000"/>
+              </a:spcAft>
+              <a:buSzPct val="100000"/>
               <a:buChar char="•"/>
               <a:lnSpc>
                 <a:spcPts val="2200"/>
@@ -13498,10 +13588,12 @@
             </a:r>
           </a:p>
           <a:p>
-            <a:pPr>
-              <a:spcAft>
-                <a:spcPts val="1000"/>
-              </a:spcAft>
+            <a:pPr lvl="0" marL="457200" indent="-228600">
+              <a:buFont typeface="Calibri"/>
+              <a:spcAft>
+                <a:spcPts val="1000"/>
+              </a:spcAft>
+              <a:buSzPct val="100000"/>
               <a:buChar char="•"/>
               <a:lnSpc>
                 <a:spcPts val="2200"/>
@@ -13518,10 +13610,12 @@
             </a:r>
           </a:p>
           <a:p>
-            <a:pPr>
-              <a:spcAft>
-                <a:spcPts val="1000"/>
-              </a:spcAft>
+            <a:pPr lvl="0" marL="457200" indent="-228600">
+              <a:buFont typeface="Calibri"/>
+              <a:spcAft>
+                <a:spcPts val="1000"/>
+              </a:spcAft>
+              <a:buSzPct val="100000"/>
               <a:buChar char="•"/>
               <a:lnSpc>
                 <a:spcPts val="2200"/>
@@ -13657,10 +13751,12 @@
           </a:bodyPr>
           <a:lstStyle/>
           <a:p>
-            <a:pPr>
-              <a:spcAft>
-                <a:spcPts val="1000"/>
-              </a:spcAft>
+            <a:pPr lvl="0" marL="457200" indent="-228600">
+              <a:buFont typeface="Calibri"/>
+              <a:spcAft>
+                <a:spcPts val="1000"/>
+              </a:spcAft>
+              <a:buSzPct val="100000"/>
               <a:buChar char="•"/>
               <a:lnSpc>
                 <a:spcPts val="2200"/>
@@ -13677,10 +13773,12 @@
             </a:r>
           </a:p>
           <a:p>
-            <a:pPr>
-              <a:spcAft>
-                <a:spcPts val="1000"/>
-              </a:spcAft>
+            <a:pPr lvl="0" marL="457200" indent="-228600">
+              <a:buFont typeface="Calibri"/>
+              <a:spcAft>
+                <a:spcPts val="1000"/>
+              </a:spcAft>
+              <a:buSzPct val="100000"/>
               <a:buChar char="•"/>
               <a:lnSpc>
                 <a:spcPts val="2200"/>
@@ -13697,10 +13795,12 @@
             </a:r>
           </a:p>
           <a:p>
-            <a:pPr>
-              <a:spcAft>
-                <a:spcPts val="1000"/>
-              </a:spcAft>
+            <a:pPr lvl="0" marL="457200" indent="-228600">
+              <a:buFont typeface="Calibri"/>
+              <a:spcAft>
+                <a:spcPts val="1000"/>
+              </a:spcAft>
+              <a:buSzPct val="100000"/>
               <a:buChar char="•"/>
               <a:lnSpc>
                 <a:spcPts val="2200"/>
@@ -13836,10 +13936,12 @@
           </a:bodyPr>
           <a:lstStyle/>
           <a:p>
-            <a:pPr>
-              <a:spcAft>
-                <a:spcPts val="1000"/>
-              </a:spcAft>
+            <a:pPr lvl="0" marL="457200" indent="-228600">
+              <a:buFont typeface="Calibri"/>
+              <a:spcAft>
+                <a:spcPts val="1000"/>
+              </a:spcAft>
+              <a:buSzPct val="100000"/>
               <a:buChar char="•"/>
               <a:lnSpc>
                 <a:spcPts val="2200"/>
@@ -13856,10 +13958,12 @@
             </a:r>
           </a:p>
           <a:p>
-            <a:pPr>
-              <a:spcAft>
-                <a:spcPts val="1000"/>
-              </a:spcAft>
+            <a:pPr lvl="0" marL="457200" indent="-228600">
+              <a:buFont typeface="Calibri"/>
+              <a:spcAft>
+                <a:spcPts val="1000"/>
+              </a:spcAft>
+              <a:buSzPct val="100000"/>
               <a:buChar char="•"/>
               <a:lnSpc>
                 <a:spcPts val="2200"/>
@@ -13995,10 +14099,12 @@
           </a:bodyPr>
           <a:lstStyle/>
           <a:p>
-            <a:pPr>
-              <a:spcAft>
-                <a:spcPts val="1000"/>
-              </a:spcAft>
+            <a:pPr lvl="0" marL="457200" indent="-228600">
+              <a:buFont typeface="Calibri"/>
+              <a:spcAft>
+                <a:spcPts val="1000"/>
+              </a:spcAft>
+              <a:buSzPct val="100000"/>
               <a:buChar char="•"/>
               <a:lnSpc>
                 <a:spcPts val="2200"/>
@@ -14015,10 +14121,12 @@
             </a:r>
           </a:p>
           <a:p>
-            <a:pPr>
-              <a:spcAft>
-                <a:spcPts val="1000"/>
-              </a:spcAft>
+            <a:pPr lvl="0" marL="457200" indent="-228600">
+              <a:buFont typeface="Calibri"/>
+              <a:spcAft>
+                <a:spcPts val="1000"/>
+              </a:spcAft>
+              <a:buSzPct val="100000"/>
               <a:buChar char="•"/>
               <a:lnSpc>
                 <a:spcPts val="2200"/>
@@ -14154,10 +14262,12 @@
           </a:bodyPr>
           <a:lstStyle/>
           <a:p>
-            <a:pPr>
-              <a:spcAft>
-                <a:spcPts val="1000"/>
-              </a:spcAft>
+            <a:pPr lvl="0" marL="457200" indent="-228600">
+              <a:buFont typeface="Calibri"/>
+              <a:spcAft>
+                <a:spcPts val="1000"/>
+              </a:spcAft>
+              <a:buSzPct val="100000"/>
               <a:buChar char="•"/>
               <a:lnSpc>
                 <a:spcPts val="2200"/>
@@ -14174,10 +14284,12 @@
             </a:r>
           </a:p>
           <a:p>
-            <a:pPr>
-              <a:spcAft>
-                <a:spcPts val="1000"/>
-              </a:spcAft>
+            <a:pPr lvl="0" marL="457200" indent="-228600">
+              <a:buFont typeface="Calibri"/>
+              <a:spcAft>
+                <a:spcPts val="1000"/>
+              </a:spcAft>
+              <a:buSzPct val="100000"/>
               <a:buChar char="•"/>
               <a:lnSpc>
                 <a:spcPts val="2200"/>
@@ -14313,10 +14425,12 @@
           </a:bodyPr>
           <a:lstStyle/>
           <a:p>
-            <a:pPr>
-              <a:spcAft>
-                <a:spcPts val="1000"/>
-              </a:spcAft>
+            <a:pPr lvl="0" marL="457200" indent="-228600">
+              <a:buFont typeface="Calibri"/>
+              <a:spcAft>
+                <a:spcPts val="1000"/>
+              </a:spcAft>
+              <a:buSzPct val="100000"/>
               <a:buChar char="•"/>
               <a:lnSpc>
                 <a:spcPts val="2200"/>
@@ -14333,10 +14447,12 @@
             </a:r>
           </a:p>
           <a:p>
-            <a:pPr>
-              <a:spcAft>
-                <a:spcPts val="1000"/>
-              </a:spcAft>
+            <a:pPr lvl="0" marL="457200" indent="-228600">
+              <a:buFont typeface="Calibri"/>
+              <a:spcAft>
+                <a:spcPts val="1000"/>
+              </a:spcAft>
+              <a:buSzPct val="100000"/>
               <a:buChar char="•"/>
               <a:lnSpc>
                 <a:spcPts val="2200"/>
@@ -14353,10 +14469,12 @@
             </a:r>
           </a:p>
           <a:p>
-            <a:pPr>
-              <a:spcAft>
-                <a:spcPts val="1000"/>
-              </a:spcAft>
+            <a:pPr lvl="0" marL="457200" indent="-228600">
+              <a:buFont typeface="Calibri"/>
+              <a:spcAft>
+                <a:spcPts val="1000"/>
+              </a:spcAft>
+              <a:buSzPct val="100000"/>
               <a:buChar char="•"/>
               <a:lnSpc>
                 <a:spcPts val="2200"/>
@@ -14492,10 +14610,12 @@
           </a:bodyPr>
           <a:lstStyle/>
           <a:p>
-            <a:pPr>
-              <a:spcAft>
-                <a:spcPts val="1000"/>
-              </a:spcAft>
+            <a:pPr lvl="0" marL="457200" indent="-228600">
+              <a:buFont typeface="Calibri"/>
+              <a:spcAft>
+                <a:spcPts val="1000"/>
+              </a:spcAft>
+              <a:buSzPct val="100000"/>
               <a:buChar char="•"/>
               <a:lnSpc>
                 <a:spcPts val="2200"/>
@@ -14512,10 +14632,12 @@
             </a:r>
           </a:p>
           <a:p>
-            <a:pPr>
-              <a:spcAft>
-                <a:spcPts val="1000"/>
-              </a:spcAft>
+            <a:pPr lvl="0" marL="457200" indent="-228600">
+              <a:buFont typeface="Calibri"/>
+              <a:spcAft>
+                <a:spcPts val="1000"/>
+              </a:spcAft>
+              <a:buSzPct val="100000"/>
               <a:buChar char="•"/>
               <a:lnSpc>
                 <a:spcPts val="2200"/>
@@ -14532,10 +14654,12 @@
             </a:r>
           </a:p>
           <a:p>
-            <a:pPr>
-              <a:spcAft>
-                <a:spcPts val="1000"/>
-              </a:spcAft>
+            <a:pPr lvl="0" marL="457200" indent="-228600">
+              <a:buFont typeface="Calibri"/>
+              <a:spcAft>
+                <a:spcPts val="1000"/>
+              </a:spcAft>
+              <a:buSzPct val="100000"/>
               <a:buChar char="•"/>
               <a:lnSpc>
                 <a:spcPts val="2200"/>
@@ -14552,10 +14676,12 @@
             </a:r>
           </a:p>
           <a:p>
-            <a:pPr>
-              <a:spcAft>
-                <a:spcPts val="1000"/>
-              </a:spcAft>
+            <a:pPr lvl="0" marL="457200" indent="-228600">
+              <a:buFont typeface="Calibri"/>
+              <a:spcAft>
+                <a:spcPts val="1000"/>
+              </a:spcAft>
+              <a:buSzPct val="100000"/>
               <a:buChar char="•"/>
               <a:lnSpc>
                 <a:spcPts val="2200"/>
@@ -14691,10 +14817,12 @@
           </a:bodyPr>
           <a:lstStyle/>
           <a:p>
-            <a:pPr>
-              <a:spcAft>
-                <a:spcPts val="1000"/>
-              </a:spcAft>
+            <a:pPr lvl="0" marL="457200" indent="-228600">
+              <a:buFont typeface="Calibri"/>
+              <a:spcAft>
+                <a:spcPts val="1000"/>
+              </a:spcAft>
+              <a:buSzPct val="100000"/>
               <a:buChar char="•"/>
               <a:lnSpc>
                 <a:spcPts val="2200"/>
@@ -14711,10 +14839,12 @@
             </a:r>
           </a:p>
           <a:p>
-            <a:pPr>
-              <a:spcAft>
-                <a:spcPts val="1000"/>
-              </a:spcAft>
+            <a:pPr lvl="0" marL="457200" indent="-228600">
+              <a:buFont typeface="Calibri"/>
+              <a:spcAft>
+                <a:spcPts val="1000"/>
+              </a:spcAft>
+              <a:buSzPct val="100000"/>
               <a:buChar char="•"/>
               <a:lnSpc>
                 <a:spcPts val="2200"/>
@@ -14731,10 +14861,12 @@
             </a:r>
           </a:p>
           <a:p>
-            <a:pPr>
-              <a:spcAft>
-                <a:spcPts val="1000"/>
-              </a:spcAft>
+            <a:pPr lvl="0" marL="457200" indent="-228600">
+              <a:buFont typeface="Calibri"/>
+              <a:spcAft>
+                <a:spcPts val="1000"/>
+              </a:spcAft>
+              <a:buSzPct val="100000"/>
               <a:buChar char="•"/>
               <a:lnSpc>
                 <a:spcPts val="2200"/>
@@ -14751,10 +14883,12 @@
             </a:r>
           </a:p>
           <a:p>
-            <a:pPr>
-              <a:spcAft>
-                <a:spcPts val="1000"/>
-              </a:spcAft>
+            <a:pPr lvl="0" marL="457200" indent="-228600">
+              <a:buFont typeface="Calibri"/>
+              <a:spcAft>
+                <a:spcPts val="1000"/>
+              </a:spcAft>
+              <a:buSzPct val="100000"/>
               <a:buChar char="•"/>
               <a:lnSpc>
                 <a:spcPts val="2200"/>
@@ -14771,10 +14905,12 @@
             </a:r>
           </a:p>
           <a:p>
-            <a:pPr>
-              <a:spcAft>
-                <a:spcPts val="1000"/>
-              </a:spcAft>
+            <a:pPr lvl="0" marL="457200" indent="-228600">
+              <a:buFont typeface="Calibri"/>
+              <a:spcAft>
+                <a:spcPts val="1000"/>
+              </a:spcAft>
+              <a:buSzPct val="100000"/>
               <a:buChar char="•"/>
               <a:lnSpc>
                 <a:spcPts val="2200"/>
@@ -14910,10 +15046,12 @@
           </a:bodyPr>
           <a:lstStyle/>
           <a:p>
-            <a:pPr>
-              <a:spcAft>
-                <a:spcPts val="1000"/>
-              </a:spcAft>
+            <a:pPr lvl="0" marL="457200" indent="-228600">
+              <a:buFont typeface="Calibri"/>
+              <a:spcAft>
+                <a:spcPts val="1000"/>
+              </a:spcAft>
+              <a:buSzPct val="100000"/>
               <a:buChar char="•"/>
               <a:lnSpc>
                 <a:spcPts val="2200"/>
@@ -14930,10 +15068,12 @@
             </a:r>
           </a:p>
           <a:p>
-            <a:pPr>
-              <a:spcAft>
-                <a:spcPts val="1000"/>
-              </a:spcAft>
+            <a:pPr lvl="0" marL="457200" indent="-228600">
+              <a:buFont typeface="Calibri"/>
+              <a:spcAft>
+                <a:spcPts val="1000"/>
+              </a:spcAft>
+              <a:buSzPct val="100000"/>
               <a:buChar char="•"/>
               <a:lnSpc>
                 <a:spcPts val="2200"/>
@@ -14950,10 +15090,12 @@
             </a:r>
           </a:p>
           <a:p>
-            <a:pPr>
-              <a:spcAft>
-                <a:spcPts val="1000"/>
-              </a:spcAft>
+            <a:pPr lvl="0" marL="457200" indent="-228600">
+              <a:buFont typeface="Calibri"/>
+              <a:spcAft>
+                <a:spcPts val="1000"/>
+              </a:spcAft>
+              <a:buSzPct val="100000"/>
               <a:buChar char="•"/>
               <a:lnSpc>
                 <a:spcPts val="2200"/>
@@ -14970,10 +15112,12 @@
             </a:r>
           </a:p>
           <a:p>
-            <a:pPr>
-              <a:spcAft>
-                <a:spcPts val="1000"/>
-              </a:spcAft>
+            <a:pPr lvl="0" marL="457200" indent="-228600">
+              <a:buFont typeface="Calibri"/>
+              <a:spcAft>
+                <a:spcPts val="1000"/>
+              </a:spcAft>
+              <a:buSzPct val="100000"/>
               <a:buChar char="•"/>
               <a:lnSpc>
                 <a:spcPts val="2200"/>
@@ -15109,10 +15253,12 @@
           </a:bodyPr>
           <a:lstStyle/>
           <a:p>
-            <a:pPr>
-              <a:spcAft>
-                <a:spcPts val="1000"/>
-              </a:spcAft>
+            <a:pPr lvl="0" marL="457200" indent="-228600">
+              <a:buFont typeface="Calibri"/>
+              <a:spcAft>
+                <a:spcPts val="1000"/>
+              </a:spcAft>
+              <a:buSzPct val="100000"/>
               <a:buChar char="•"/>
               <a:lnSpc>
                 <a:spcPts val="2200"/>
@@ -15129,10 +15275,12 @@
             </a:r>
           </a:p>
           <a:p>
-            <a:pPr>
-              <a:spcAft>
-                <a:spcPts val="1000"/>
-              </a:spcAft>
+            <a:pPr lvl="0" marL="457200" indent="-228600">
+              <a:buFont typeface="Calibri"/>
+              <a:spcAft>
+                <a:spcPts val="1000"/>
+              </a:spcAft>
+              <a:buSzPct val="100000"/>
               <a:buChar char="•"/>
               <a:lnSpc>
                 <a:spcPts val="2200"/>
@@ -15149,10 +15297,12 @@
             </a:r>
           </a:p>
           <a:p>
-            <a:pPr>
-              <a:spcAft>
-                <a:spcPts val="1000"/>
-              </a:spcAft>
+            <a:pPr lvl="0" marL="457200" indent="-228600">
+              <a:buFont typeface="Calibri"/>
+              <a:spcAft>
+                <a:spcPts val="1000"/>
+              </a:spcAft>
+              <a:buSzPct val="100000"/>
               <a:buChar char="•"/>
               <a:lnSpc>
                 <a:spcPts val="2200"/>
@@ -15169,10 +15319,12 @@
             </a:r>
           </a:p>
           <a:p>
-            <a:pPr>
-              <a:spcAft>
-                <a:spcPts val="1000"/>
-              </a:spcAft>
+            <a:pPr lvl="0" marL="457200" indent="-228600">
+              <a:buFont typeface="Calibri"/>
+              <a:spcAft>
+                <a:spcPts val="1000"/>
+              </a:spcAft>
+              <a:buSzPct val="100000"/>
               <a:buChar char="•"/>
               <a:lnSpc>
                 <a:spcPts val="2200"/>
@@ -15308,10 +15460,12 @@
           </a:bodyPr>
           <a:lstStyle/>
           <a:p>
-            <a:pPr>
-              <a:spcAft>
-                <a:spcPts val="1000"/>
-              </a:spcAft>
+            <a:pPr lvl="0" marL="457200" indent="-228600">
+              <a:buFont typeface="Calibri"/>
+              <a:spcAft>
+                <a:spcPts val="1000"/>
+              </a:spcAft>
+              <a:buSzPct val="100000"/>
               <a:buChar char="•"/>
               <a:lnSpc>
                 <a:spcPts val="2200"/>
@@ -15328,10 +15482,12 @@
             </a:r>
           </a:p>
           <a:p>
-            <a:pPr>
-              <a:spcAft>
-                <a:spcPts val="1000"/>
-              </a:spcAft>
+            <a:pPr lvl="0" marL="457200" indent="-228600">
+              <a:buFont typeface="Calibri"/>
+              <a:spcAft>
+                <a:spcPts val="1000"/>
+              </a:spcAft>
+              <a:buSzPct val="100000"/>
               <a:buChar char="•"/>
               <a:lnSpc>
                 <a:spcPts val="2200"/>
@@ -15348,10 +15504,12 @@
             </a:r>
           </a:p>
           <a:p>
-            <a:pPr>
-              <a:spcAft>
-                <a:spcPts val="1000"/>
-              </a:spcAft>
+            <a:pPr lvl="0" marL="457200" indent="-228600">
+              <a:buFont typeface="Calibri"/>
+              <a:spcAft>
+                <a:spcPts val="1000"/>
+              </a:spcAft>
+              <a:buSzPct val="100000"/>
               <a:buChar char="•"/>
               <a:lnSpc>
                 <a:spcPts val="2200"/>
@@ -15487,10 +15645,12 @@
           </a:bodyPr>
           <a:lstStyle/>
           <a:p>
-            <a:pPr>
-              <a:spcAft>
-                <a:spcPts val="1000"/>
-              </a:spcAft>
+            <a:pPr lvl="0" marL="457200" indent="-228600">
+              <a:buFont typeface="Calibri"/>
+              <a:spcAft>
+                <a:spcPts val="1000"/>
+              </a:spcAft>
+              <a:buSzPct val="100000"/>
               <a:buChar char="•"/>
               <a:lnSpc>
                 <a:spcPts val="2200"/>
@@ -15507,10 +15667,12 @@
             </a:r>
           </a:p>
           <a:p>
-            <a:pPr>
-              <a:spcAft>
-                <a:spcPts val="1000"/>
-              </a:spcAft>
+            <a:pPr lvl="0" marL="457200" indent="-228600">
+              <a:buFont typeface="Calibri"/>
+              <a:spcAft>
+                <a:spcPts val="1000"/>
+              </a:spcAft>
+              <a:buSzPct val="100000"/>
               <a:buChar char="•"/>
               <a:lnSpc>
                 <a:spcPts val="2200"/>
@@ -15646,10 +15808,12 @@
           </a:bodyPr>
           <a:lstStyle/>
           <a:p>
-            <a:pPr>
-              <a:spcAft>
-                <a:spcPts val="1000"/>
-              </a:spcAft>
+            <a:pPr lvl="0" marL="457200" indent="-228600">
+              <a:buFont typeface="Calibri"/>
+              <a:spcAft>
+                <a:spcPts val="1000"/>
+              </a:spcAft>
+              <a:buSzPct val="100000"/>
               <a:buChar char="•"/>
               <a:lnSpc>
                 <a:spcPts val="2200"/>
@@ -15666,10 +15830,12 @@
             </a:r>
           </a:p>
           <a:p>
-            <a:pPr>
-              <a:spcAft>
-                <a:spcPts val="1000"/>
-              </a:spcAft>
+            <a:pPr lvl="0" marL="457200" indent="-228600">
+              <a:buFont typeface="Calibri"/>
+              <a:spcAft>
+                <a:spcPts val="1000"/>
+              </a:spcAft>
+              <a:buSzPct val="100000"/>
               <a:buChar char="•"/>
               <a:lnSpc>
                 <a:spcPts val="2200"/>
@@ -15805,10 +15971,12 @@
           </a:bodyPr>
           <a:lstStyle/>
           <a:p>
-            <a:pPr>
-              <a:spcAft>
-                <a:spcPts val="1000"/>
-              </a:spcAft>
+            <a:pPr lvl="0" marL="457200" indent="-228600">
+              <a:buFont typeface="Calibri"/>
+              <a:spcAft>
+                <a:spcPts val="1000"/>
+              </a:spcAft>
+              <a:buSzPct val="100000"/>
               <a:buChar char="•"/>
               <a:lnSpc>
                 <a:spcPts val="2200"/>
@@ -15825,10 +15993,12 @@
             </a:r>
           </a:p>
           <a:p>
-            <a:pPr>
-              <a:spcAft>
-                <a:spcPts val="1000"/>
-              </a:spcAft>
+            <a:pPr lvl="0" marL="457200" indent="-228600">
+              <a:buFont typeface="Calibri"/>
+              <a:spcAft>
+                <a:spcPts val="1000"/>
+              </a:spcAft>
+              <a:buSzPct val="100000"/>
               <a:buChar char="•"/>
               <a:lnSpc>
                 <a:spcPts val="2200"/>
@@ -15845,10 +16015,12 @@
             </a:r>
           </a:p>
           <a:p>
-            <a:pPr>
-              <a:spcAft>
-                <a:spcPts val="1000"/>
-              </a:spcAft>
+            <a:pPr lvl="0" marL="457200" indent="-228600">
+              <a:buFont typeface="Calibri"/>
+              <a:spcAft>
+                <a:spcPts val="1000"/>
+              </a:spcAft>
+              <a:buSzPct val="100000"/>
               <a:buChar char="•"/>
               <a:lnSpc>
                 <a:spcPts val="2200"/>
@@ -15865,10 +16037,12 @@
             </a:r>
           </a:p>
           <a:p>
-            <a:pPr>
-              <a:spcAft>
-                <a:spcPts val="1000"/>
-              </a:spcAft>
+            <a:pPr lvl="0" marL="457200" indent="-228600">
+              <a:buFont typeface="Calibri"/>
+              <a:spcAft>
+                <a:spcPts val="1000"/>
+              </a:spcAft>
+              <a:buSzPct val="100000"/>
               <a:buChar char="•"/>
               <a:lnSpc>
                 <a:spcPts val="2200"/>
@@ -16004,10 +16178,12 @@
           </a:bodyPr>
           <a:lstStyle/>
           <a:p>
-            <a:pPr>
-              <a:spcAft>
-                <a:spcPts val="1000"/>
-              </a:spcAft>
+            <a:pPr lvl="0" marL="457200" indent="-228600">
+              <a:buFont typeface="Calibri"/>
+              <a:spcAft>
+                <a:spcPts val="1000"/>
+              </a:spcAft>
+              <a:buSzPct val="100000"/>
               <a:buChar char="•"/>
               <a:lnSpc>
                 <a:spcPts val="2200"/>
@@ -16024,10 +16200,12 @@
             </a:r>
           </a:p>
           <a:p>
-            <a:pPr>
-              <a:spcAft>
-                <a:spcPts val="1000"/>
-              </a:spcAft>
+            <a:pPr lvl="0" marL="457200" indent="-228600">
+              <a:buFont typeface="Calibri"/>
+              <a:spcAft>
+                <a:spcPts val="1000"/>
+              </a:spcAft>
+              <a:buSzPct val="100000"/>
               <a:buChar char="•"/>
               <a:lnSpc>
                 <a:spcPts val="2200"/>
@@ -16163,10 +16341,12 @@
           </a:bodyPr>
           <a:lstStyle/>
           <a:p>
-            <a:pPr>
-              <a:spcAft>
-                <a:spcPts val="1000"/>
-              </a:spcAft>
+            <a:pPr lvl="0" marL="457200" indent="-228600">
+              <a:buFont typeface="Calibri"/>
+              <a:spcAft>
+                <a:spcPts val="1000"/>
+              </a:spcAft>
+              <a:buSzPct val="100000"/>
               <a:buChar char="•"/>
               <a:lnSpc>
                 <a:spcPts val="2200"/>
@@ -16183,10 +16363,12 @@
             </a:r>
           </a:p>
           <a:p>
-            <a:pPr>
-              <a:spcAft>
-                <a:spcPts val="1000"/>
-              </a:spcAft>
+            <a:pPr lvl="0" marL="457200" indent="-228600">
+              <a:buFont typeface="Calibri"/>
+              <a:spcAft>
+                <a:spcPts val="1000"/>
+              </a:spcAft>
+              <a:buSzPct val="100000"/>
               <a:buChar char="•"/>
               <a:lnSpc>
                 <a:spcPts val="2200"/>
@@ -16203,10 +16385,12 @@
             </a:r>
           </a:p>
           <a:p>
-            <a:pPr>
-              <a:spcAft>
-                <a:spcPts val="1000"/>
-              </a:spcAft>
+            <a:pPr lvl="0" marL="457200" indent="-228600">
+              <a:buFont typeface="Calibri"/>
+              <a:spcAft>
+                <a:spcPts val="1000"/>
+              </a:spcAft>
+              <a:buSzPct val="100000"/>
               <a:buChar char="•"/>
               <a:lnSpc>
                 <a:spcPts val="2200"/>
@@ -16342,10 +16526,12 @@
           </a:bodyPr>
           <a:lstStyle/>
           <a:p>
-            <a:pPr>
-              <a:spcAft>
-                <a:spcPts val="1000"/>
-              </a:spcAft>
+            <a:pPr lvl="0" marL="457200" indent="-228600">
+              <a:buFont typeface="Calibri"/>
+              <a:spcAft>
+                <a:spcPts val="1000"/>
+              </a:spcAft>
+              <a:buSzPct val="100000"/>
               <a:buChar char="•"/>
               <a:lnSpc>
                 <a:spcPts val="2200"/>
@@ -16362,10 +16548,12 @@
             </a:r>
           </a:p>
           <a:p>
-            <a:pPr>
-              <a:spcAft>
-                <a:spcPts val="1000"/>
-              </a:spcAft>
+            <a:pPr lvl="0" marL="457200" indent="-228600">
+              <a:buFont typeface="Calibri"/>
+              <a:spcAft>
+                <a:spcPts val="1000"/>
+              </a:spcAft>
+              <a:buSzPct val="100000"/>
               <a:buChar char="•"/>
               <a:lnSpc>
                 <a:spcPts val="2200"/>
@@ -16382,10 +16570,12 @@
             </a:r>
           </a:p>
           <a:p>
-            <a:pPr>
-              <a:spcAft>
-                <a:spcPts val="1000"/>
-              </a:spcAft>
+            <a:pPr lvl="0" marL="457200" indent="-228600">
+              <a:buFont typeface="Calibri"/>
+              <a:spcAft>
+                <a:spcPts val="1000"/>
+              </a:spcAft>
+              <a:buSzPct val="100000"/>
               <a:buChar char="•"/>
               <a:lnSpc>
                 <a:spcPts val="2200"/>
@@ -16402,10 +16592,12 @@
             </a:r>
           </a:p>
           <a:p>
-            <a:pPr>
-              <a:spcAft>
-                <a:spcPts val="1000"/>
-              </a:spcAft>
+            <a:pPr lvl="0" marL="457200" indent="-228600">
+              <a:buFont typeface="Calibri"/>
+              <a:spcAft>
+                <a:spcPts val="1000"/>
+              </a:spcAft>
+              <a:buSzPct val="100000"/>
               <a:buChar char="•"/>
               <a:lnSpc>
                 <a:spcPts val="2200"/>
@@ -16541,10 +16733,12 @@
           </a:bodyPr>
           <a:lstStyle/>
           <a:p>
-            <a:pPr>
-              <a:spcAft>
-                <a:spcPts val="1000"/>
-              </a:spcAft>
+            <a:pPr lvl="0" marL="457200" indent="-228600">
+              <a:buFont typeface="Calibri"/>
+              <a:spcAft>
+                <a:spcPts val="1000"/>
+              </a:spcAft>
+              <a:buSzPct val="100000"/>
               <a:buChar char="•"/>
               <a:lnSpc>
                 <a:spcPts val="2200"/>
@@ -16561,10 +16755,12 @@
             </a:r>
           </a:p>
           <a:p>
-            <a:pPr>
-              <a:spcAft>
-                <a:spcPts val="1000"/>
-              </a:spcAft>
+            <a:pPr lvl="0" marL="457200" indent="-228600">
+              <a:buFont typeface="Calibri"/>
+              <a:spcAft>
+                <a:spcPts val="1000"/>
+              </a:spcAft>
+              <a:buSzPct val="100000"/>
               <a:buChar char="•"/>
               <a:lnSpc>
                 <a:spcPts val="2200"/>
@@ -16581,10 +16777,12 @@
             </a:r>
           </a:p>
           <a:p>
-            <a:pPr>
-              <a:spcAft>
-                <a:spcPts val="1000"/>
-              </a:spcAft>
+            <a:pPr lvl="0" marL="457200" indent="-228600">
+              <a:buFont typeface="Calibri"/>
+              <a:spcAft>
+                <a:spcPts val="1000"/>
+              </a:spcAft>
+              <a:buSzPct val="100000"/>
               <a:buChar char="•"/>
               <a:lnSpc>
                 <a:spcPts val="2200"/>
@@ -16601,10 +16799,12 @@
             </a:r>
           </a:p>
           <a:p>
-            <a:pPr>
-              <a:spcAft>
-                <a:spcPts val="1000"/>
-              </a:spcAft>
+            <a:pPr lvl="0" marL="457200" indent="-228600">
+              <a:buFont typeface="Calibri"/>
+              <a:spcAft>
+                <a:spcPts val="1000"/>
+              </a:spcAft>
+              <a:buSzPct val="100000"/>
               <a:buChar char="•"/>
               <a:lnSpc>
                 <a:spcPts val="2200"/>
@@ -16740,10 +16940,12 @@
           </a:bodyPr>
           <a:lstStyle/>
           <a:p>
-            <a:pPr>
-              <a:spcAft>
-                <a:spcPts val="1000"/>
-              </a:spcAft>
+            <a:pPr lvl="0" marL="457200" indent="-228600">
+              <a:buFont typeface="Calibri"/>
+              <a:spcAft>
+                <a:spcPts val="1000"/>
+              </a:spcAft>
+              <a:buSzPct val="100000"/>
               <a:buChar char="•"/>
               <a:lnSpc>
                 <a:spcPts val="2200"/>
@@ -16760,10 +16962,12 @@
             </a:r>
           </a:p>
           <a:p>
-            <a:pPr>
-              <a:spcAft>
-                <a:spcPts val="1000"/>
-              </a:spcAft>
+            <a:pPr lvl="0" marL="457200" indent="-228600">
+              <a:buFont typeface="Calibri"/>
+              <a:spcAft>
+                <a:spcPts val="1000"/>
+              </a:spcAft>
+              <a:buSzPct val="100000"/>
               <a:buChar char="•"/>
               <a:lnSpc>
                 <a:spcPts val="2200"/>
@@ -16780,10 +16984,12 @@
             </a:r>
           </a:p>
           <a:p>
-            <a:pPr>
-              <a:spcAft>
-                <a:spcPts val="1000"/>
-              </a:spcAft>
+            <a:pPr lvl="0" marL="457200" indent="-228600">
+              <a:buFont typeface="Calibri"/>
+              <a:spcAft>
+                <a:spcPts val="1000"/>
+              </a:spcAft>
+              <a:buSzPct val="100000"/>
               <a:buChar char="•"/>
               <a:lnSpc>
                 <a:spcPts val="2200"/>
@@ -16800,10 +17006,12 @@
             </a:r>
           </a:p>
           <a:p>
-            <a:pPr>
-              <a:spcAft>
-                <a:spcPts val="1000"/>
-              </a:spcAft>
+            <a:pPr lvl="0" marL="457200" indent="-228600">
+              <a:buFont typeface="Calibri"/>
+              <a:spcAft>
+                <a:spcPts val="1000"/>
+              </a:spcAft>
+              <a:buSzPct val="100000"/>
               <a:buChar char="•"/>
               <a:lnSpc>
                 <a:spcPts val="2200"/>
@@ -16939,10 +17147,12 @@
           </a:bodyPr>
           <a:lstStyle/>
           <a:p>
-            <a:pPr>
-              <a:spcAft>
-                <a:spcPts val="1000"/>
-              </a:spcAft>
+            <a:pPr lvl="0" marL="457200" indent="-228600">
+              <a:buFont typeface="Calibri"/>
+              <a:spcAft>
+                <a:spcPts val="1000"/>
+              </a:spcAft>
+              <a:buSzPct val="100000"/>
               <a:buChar char="•"/>
               <a:lnSpc>
                 <a:spcPts val="2200"/>
@@ -16959,10 +17169,12 @@
             </a:r>
           </a:p>
           <a:p>
-            <a:pPr>
-              <a:spcAft>
-                <a:spcPts val="1000"/>
-              </a:spcAft>
+            <a:pPr lvl="0" marL="457200" indent="-228600">
+              <a:buFont typeface="Calibri"/>
+              <a:spcAft>
+                <a:spcPts val="1000"/>
+              </a:spcAft>
+              <a:buSzPct val="100000"/>
               <a:buChar char="•"/>
               <a:lnSpc>
                 <a:spcPts val="2200"/>
@@ -16979,10 +17191,12 @@
             </a:r>
           </a:p>
           <a:p>
-            <a:pPr>
-              <a:spcAft>
-                <a:spcPts val="1000"/>
-              </a:spcAft>
+            <a:pPr lvl="0" marL="457200" indent="-228600">
+              <a:buFont typeface="Calibri"/>
+              <a:spcAft>
+                <a:spcPts val="1000"/>
+              </a:spcAft>
+              <a:buSzPct val="100000"/>
               <a:buChar char="•"/>
               <a:lnSpc>
                 <a:spcPts val="2200"/>
@@ -17118,10 +17332,12 @@
           </a:bodyPr>
           <a:lstStyle/>
           <a:p>
-            <a:pPr>
-              <a:spcAft>
-                <a:spcPts val="1000"/>
-              </a:spcAft>
+            <a:pPr lvl="0" marL="457200" indent="-228600">
+              <a:buFont typeface="Calibri"/>
+              <a:spcAft>
+                <a:spcPts val="1000"/>
+              </a:spcAft>
+              <a:buSzPct val="100000"/>
               <a:buChar char="•"/>
               <a:lnSpc>
                 <a:spcPts val="2200"/>
@@ -17138,10 +17354,12 @@
             </a:r>
           </a:p>
           <a:p>
-            <a:pPr>
-              <a:spcAft>
-                <a:spcPts val="1000"/>
-              </a:spcAft>
+            <a:pPr lvl="0" marL="457200" indent="-228600">
+              <a:buFont typeface="Calibri"/>
+              <a:spcAft>
+                <a:spcPts val="1000"/>
+              </a:spcAft>
+              <a:buSzPct val="100000"/>
               <a:buChar char="•"/>
               <a:lnSpc>
                 <a:spcPts val="2200"/>
@@ -17158,10 +17376,12 @@
             </a:r>
           </a:p>
           <a:p>
-            <a:pPr>
-              <a:spcAft>
-                <a:spcPts val="1000"/>
-              </a:spcAft>
+            <a:pPr lvl="0" marL="457200" indent="-228600">
+              <a:buFont typeface="Calibri"/>
+              <a:spcAft>
+                <a:spcPts val="1000"/>
+              </a:spcAft>
+              <a:buSzPct val="100000"/>
               <a:buChar char="•"/>
               <a:lnSpc>
                 <a:spcPts val="2200"/>
@@ -17297,10 +17517,12 @@
           </a:bodyPr>
           <a:lstStyle/>
           <a:p>
-            <a:pPr>
-              <a:spcAft>
-                <a:spcPts val="1000"/>
-              </a:spcAft>
+            <a:pPr lvl="0" marL="457200" indent="-228600">
+              <a:buFont typeface="Calibri"/>
+              <a:spcAft>
+                <a:spcPts val="1000"/>
+              </a:spcAft>
+              <a:buSzPct val="100000"/>
               <a:buChar char="•"/>
               <a:lnSpc>
                 <a:spcPts val="2200"/>
@@ -17317,10 +17539,12 @@
             </a:r>
           </a:p>
           <a:p>
-            <a:pPr>
-              <a:spcAft>
-                <a:spcPts val="1000"/>
-              </a:spcAft>
+            <a:pPr lvl="0" marL="457200" indent="-228600">
+              <a:buFont typeface="Calibri"/>
+              <a:spcAft>
+                <a:spcPts val="1000"/>
+              </a:spcAft>
+              <a:buSzPct val="100000"/>
               <a:buChar char="•"/>
               <a:lnSpc>
                 <a:spcPts val="2200"/>
@@ -17456,10 +17680,12 @@
           </a:bodyPr>
           <a:lstStyle/>
           <a:p>
-            <a:pPr>
-              <a:spcAft>
-                <a:spcPts val="1000"/>
-              </a:spcAft>
+            <a:pPr lvl="0" marL="457200" indent="-228600">
+              <a:buFont typeface="Calibri"/>
+              <a:spcAft>
+                <a:spcPts val="1000"/>
+              </a:spcAft>
+              <a:buSzPct val="100000"/>
               <a:buChar char="•"/>
               <a:lnSpc>
                 <a:spcPts val="2200"/>
@@ -17476,10 +17702,12 @@
             </a:r>
           </a:p>
           <a:p>
-            <a:pPr>
-              <a:spcAft>
-                <a:spcPts val="1000"/>
-              </a:spcAft>
+            <a:pPr lvl="0" marL="457200" indent="-228600">
+              <a:buFont typeface="Calibri"/>
+              <a:spcAft>
+                <a:spcPts val="1000"/>
+              </a:spcAft>
+              <a:buSzPct val="100000"/>
               <a:buChar char="•"/>
               <a:lnSpc>
                 <a:spcPts val="2200"/>
@@ -17496,10 +17724,12 @@
             </a:r>
           </a:p>
           <a:p>
-            <a:pPr>
-              <a:spcAft>
-                <a:spcPts val="1000"/>
-              </a:spcAft>
+            <a:pPr lvl="0" marL="457200" indent="-228600">
+              <a:buFont typeface="Calibri"/>
+              <a:spcAft>
+                <a:spcPts val="1000"/>
+              </a:spcAft>
+              <a:buSzPct val="100000"/>
               <a:buChar char="•"/>
               <a:lnSpc>
                 <a:spcPts val="2200"/>
@@ -17635,10 +17865,12 @@
           </a:bodyPr>
           <a:lstStyle/>
           <a:p>
-            <a:pPr>
-              <a:spcAft>
-                <a:spcPts val="1000"/>
-              </a:spcAft>
+            <a:pPr lvl="0" marL="457200" indent="-228600">
+              <a:buFont typeface="Calibri"/>
+              <a:spcAft>
+                <a:spcPts val="1000"/>
+              </a:spcAft>
+              <a:buSzPct val="100000"/>
               <a:buChar char="•"/>
               <a:lnSpc>
                 <a:spcPts val="2200"/>
@@ -17655,10 +17887,12 @@
             </a:r>
           </a:p>
           <a:p>
-            <a:pPr>
-              <a:spcAft>
-                <a:spcPts val="1000"/>
-              </a:spcAft>
+            <a:pPr lvl="0" marL="457200" indent="-228600">
+              <a:buFont typeface="Calibri"/>
+              <a:spcAft>
+                <a:spcPts val="1000"/>
+              </a:spcAft>
+              <a:buSzPct val="100000"/>
               <a:buChar char="•"/>
               <a:lnSpc>
                 <a:spcPts val="2200"/>
@@ -17675,10 +17909,12 @@
             </a:r>
           </a:p>
           <a:p>
-            <a:pPr>
-              <a:spcAft>
-                <a:spcPts val="1000"/>
-              </a:spcAft>
+            <a:pPr lvl="0" marL="457200" indent="-228600">
+              <a:buFont typeface="Calibri"/>
+              <a:spcAft>
+                <a:spcPts val="1000"/>
+              </a:spcAft>
+              <a:buSzPct val="100000"/>
               <a:buChar char="•"/>
               <a:lnSpc>
                 <a:spcPts val="2200"/>
@@ -17814,10 +18050,12 @@
           </a:bodyPr>
           <a:lstStyle/>
           <a:p>
-            <a:pPr>
-              <a:spcAft>
-                <a:spcPts val="1000"/>
-              </a:spcAft>
+            <a:pPr lvl="0" marL="457200" indent="-228600">
+              <a:buFont typeface="Calibri"/>
+              <a:spcAft>
+                <a:spcPts val="1000"/>
+              </a:spcAft>
+              <a:buSzPct val="100000"/>
               <a:buChar char="•"/>
               <a:lnSpc>
                 <a:spcPts val="2200"/>
@@ -17834,10 +18072,12 @@
             </a:r>
           </a:p>
           <a:p>
-            <a:pPr>
-              <a:spcAft>
-                <a:spcPts val="1000"/>
-              </a:spcAft>
+            <a:pPr lvl="0" marL="457200" indent="-228600">
+              <a:buFont typeface="Calibri"/>
+              <a:spcAft>
+                <a:spcPts val="1000"/>
+              </a:spcAft>
+              <a:buSzPct val="100000"/>
               <a:buChar char="•"/>
               <a:lnSpc>
                 <a:spcPts val="2200"/>
@@ -17854,10 +18094,12 @@
             </a:r>
           </a:p>
           <a:p>
-            <a:pPr>
-              <a:spcAft>
-                <a:spcPts val="1000"/>
-              </a:spcAft>
+            <a:pPr lvl="0" marL="457200" indent="-228600">
+              <a:buFont typeface="Calibri"/>
+              <a:spcAft>
+                <a:spcPts val="1000"/>
+              </a:spcAft>
+              <a:buSzPct val="100000"/>
               <a:buChar char="•"/>
               <a:lnSpc>
                 <a:spcPts val="2200"/>
@@ -17874,10 +18116,12 @@
             </a:r>
           </a:p>
           <a:p>
-            <a:pPr>
-              <a:spcAft>
-                <a:spcPts val="1000"/>
-              </a:spcAft>
+            <a:pPr lvl="0" marL="457200" indent="-228600">
+              <a:buFont typeface="Calibri"/>
+              <a:spcAft>
+                <a:spcPts val="1000"/>
+              </a:spcAft>
+              <a:buSzPct val="100000"/>
               <a:buChar char="•"/>
               <a:lnSpc>
                 <a:spcPts val="2200"/>
@@ -18013,10 +18257,12 @@
           </a:bodyPr>
           <a:lstStyle/>
           <a:p>
-            <a:pPr>
-              <a:spcAft>
-                <a:spcPts val="1000"/>
-              </a:spcAft>
+            <a:pPr lvl="0" marL="457200" indent="-228600">
+              <a:buFont typeface="Calibri"/>
+              <a:spcAft>
+                <a:spcPts val="1000"/>
+              </a:spcAft>
+              <a:buSzPct val="100000"/>
               <a:buChar char="•"/>
               <a:lnSpc>
                 <a:spcPts val="2200"/>
@@ -18033,10 +18279,12 @@
             </a:r>
           </a:p>
           <a:p>
-            <a:pPr>
-              <a:spcAft>
-                <a:spcPts val="1000"/>
-              </a:spcAft>
+            <a:pPr lvl="0" marL="457200" indent="-228600">
+              <a:buFont typeface="Calibri"/>
+              <a:spcAft>
+                <a:spcPts val="1000"/>
+              </a:spcAft>
+              <a:buSzPct val="100000"/>
               <a:buChar char="•"/>
               <a:lnSpc>
                 <a:spcPts val="2200"/>
@@ -18053,10 +18301,12 @@
             </a:r>
           </a:p>
           <a:p>
-            <a:pPr>
-              <a:spcAft>
-                <a:spcPts val="1000"/>
-              </a:spcAft>
+            <a:pPr lvl="0" marL="457200" indent="-228600">
+              <a:buFont typeface="Calibri"/>
+              <a:spcAft>
+                <a:spcPts val="1000"/>
+              </a:spcAft>
+              <a:buSzPct val="100000"/>
               <a:buChar char="•"/>
               <a:lnSpc>
                 <a:spcPts val="2200"/>
@@ -18073,10 +18323,12 @@
             </a:r>
           </a:p>
           <a:p>
-            <a:pPr>
-              <a:spcAft>
-                <a:spcPts val="1000"/>
-              </a:spcAft>
+            <a:pPr lvl="0" marL="457200" indent="-228600">
+              <a:buFont typeface="Calibri"/>
+              <a:spcAft>
+                <a:spcPts val="1000"/>
+              </a:spcAft>
+              <a:buSzPct val="100000"/>
               <a:buChar char="•"/>
               <a:lnSpc>
                 <a:spcPts val="2200"/>
@@ -18093,10 +18345,12 @@
             </a:r>
           </a:p>
           <a:p>
-            <a:pPr>
-              <a:spcAft>
-                <a:spcPts val="1000"/>
-              </a:spcAft>
+            <a:pPr lvl="0" marL="457200" indent="-228600">
+              <a:buFont typeface="Calibri"/>
+              <a:spcAft>
+                <a:spcPts val="1000"/>
+              </a:spcAft>
+              <a:buSzPct val="100000"/>
               <a:buChar char="•"/>
               <a:lnSpc>
                 <a:spcPts val="2200"/>
@@ -18232,10 +18486,12 @@
           </a:bodyPr>
           <a:lstStyle/>
           <a:p>
-            <a:pPr>
-              <a:spcAft>
-                <a:spcPts val="1000"/>
-              </a:spcAft>
+            <a:pPr lvl="0" marL="457200" indent="-228600">
+              <a:buFont typeface="Calibri"/>
+              <a:spcAft>
+                <a:spcPts val="1000"/>
+              </a:spcAft>
+              <a:buSzPct val="100000"/>
               <a:buChar char="•"/>
               <a:lnSpc>
                 <a:spcPts val="2200"/>
@@ -18252,10 +18508,12 @@
             </a:r>
           </a:p>
           <a:p>
-            <a:pPr>
-              <a:spcAft>
-                <a:spcPts val="1000"/>
-              </a:spcAft>
+            <a:pPr lvl="0" marL="457200" indent="-228600">
+              <a:buFont typeface="Calibri"/>
+              <a:spcAft>
+                <a:spcPts val="1000"/>
+              </a:spcAft>
+              <a:buSzPct val="100000"/>
               <a:buChar char="•"/>
               <a:lnSpc>
                 <a:spcPts val="2200"/>
@@ -18272,10 +18530,12 @@
             </a:r>
           </a:p>
           <a:p>
-            <a:pPr>
-              <a:spcAft>
-                <a:spcPts val="1000"/>
-              </a:spcAft>
+            <a:pPr lvl="0" marL="457200" indent="-228600">
+              <a:buFont typeface="Calibri"/>
+              <a:spcAft>
+                <a:spcPts val="1000"/>
+              </a:spcAft>
+              <a:buSzPct val="100000"/>
               <a:buChar char="•"/>
               <a:lnSpc>
                 <a:spcPts val="2200"/>
@@ -18292,10 +18552,12 @@
             </a:r>
           </a:p>
           <a:p>
-            <a:pPr>
-              <a:spcAft>
-                <a:spcPts val="1000"/>
-              </a:spcAft>
+            <a:pPr lvl="0" marL="457200" indent="-228600">
+              <a:buFont typeface="Calibri"/>
+              <a:spcAft>
+                <a:spcPts val="1000"/>
+              </a:spcAft>
+              <a:buSzPct val="100000"/>
               <a:buChar char="•"/>
               <a:lnSpc>
                 <a:spcPts val="2200"/>
@@ -18431,10 +18693,12 @@
           </a:bodyPr>
           <a:lstStyle/>
           <a:p>
-            <a:pPr>
-              <a:spcAft>
-                <a:spcPts val="1000"/>
-              </a:spcAft>
+            <a:pPr lvl="0" marL="457200" indent="-228600">
+              <a:buFont typeface="Calibri"/>
+              <a:spcAft>
+                <a:spcPts val="1000"/>
+              </a:spcAft>
+              <a:buSzPct val="100000"/>
               <a:buChar char="•"/>
               <a:lnSpc>
                 <a:spcPts val="2200"/>
@@ -18451,10 +18715,12 @@
             </a:r>
           </a:p>
           <a:p>
-            <a:pPr>
-              <a:spcAft>
-                <a:spcPts val="1000"/>
-              </a:spcAft>
+            <a:pPr lvl="0" marL="457200" indent="-228600">
+              <a:buFont typeface="Calibri"/>
+              <a:spcAft>
+                <a:spcPts val="1000"/>
+              </a:spcAft>
+              <a:buSzPct val="100000"/>
               <a:buChar char="•"/>
               <a:lnSpc>
                 <a:spcPts val="2200"/>
@@ -18471,10 +18737,12 @@
             </a:r>
           </a:p>
           <a:p>
-            <a:pPr>
-              <a:spcAft>
-                <a:spcPts val="1000"/>
-              </a:spcAft>
+            <a:pPr lvl="0" marL="457200" indent="-228600">
+              <a:buFont typeface="Calibri"/>
+              <a:spcAft>
+                <a:spcPts val="1000"/>
+              </a:spcAft>
+              <a:buSzPct val="100000"/>
               <a:buChar char="•"/>
               <a:lnSpc>
                 <a:spcPts val="2200"/>
@@ -18610,10 +18878,12 @@
           </a:bodyPr>
           <a:lstStyle/>
           <a:p>
-            <a:pPr>
-              <a:spcAft>
-                <a:spcPts val="1000"/>
-              </a:spcAft>
+            <a:pPr lvl="0" marL="457200" indent="-228600">
+              <a:buFont typeface="Calibri"/>
+              <a:spcAft>
+                <a:spcPts val="1000"/>
+              </a:spcAft>
+              <a:buSzPct val="100000"/>
               <a:buChar char="•"/>
               <a:lnSpc>
                 <a:spcPts val="2200"/>
@@ -18630,10 +18900,12 @@
             </a:r>
           </a:p>
           <a:p>
-            <a:pPr>
-              <a:spcAft>
-                <a:spcPts val="1000"/>
-              </a:spcAft>
+            <a:pPr lvl="0" marL="457200" indent="-228600">
+              <a:buFont typeface="Calibri"/>
+              <a:spcAft>
+                <a:spcPts val="1000"/>
+              </a:spcAft>
+              <a:buSzPct val="100000"/>
               <a:buChar char="•"/>
               <a:lnSpc>
                 <a:spcPts val="2200"/>
@@ -18650,10 +18922,12 @@
             </a:r>
           </a:p>
           <a:p>
-            <a:pPr>
-              <a:spcAft>
-                <a:spcPts val="1000"/>
-              </a:spcAft>
+            <a:pPr lvl="0" marL="457200" indent="-228600">
+              <a:buFont typeface="Calibri"/>
+              <a:spcAft>
+                <a:spcPts val="1000"/>
+              </a:spcAft>
+              <a:buSzPct val="100000"/>
               <a:buChar char="•"/>
               <a:lnSpc>
                 <a:spcPts val="2200"/>
@@ -18789,10 +19063,12 @@
           </a:bodyPr>
           <a:lstStyle/>
           <a:p>
-            <a:pPr>
-              <a:spcAft>
-                <a:spcPts val="1000"/>
-              </a:spcAft>
+            <a:pPr lvl="0" marL="457200" indent="-228600">
+              <a:buFont typeface="Calibri"/>
+              <a:spcAft>
+                <a:spcPts val="1000"/>
+              </a:spcAft>
+              <a:buSzPct val="100000"/>
               <a:buChar char="•"/>
               <a:lnSpc>
                 <a:spcPts val="2200"/>
@@ -18809,10 +19085,12 @@
             </a:r>
           </a:p>
           <a:p>
-            <a:pPr>
-              <a:spcAft>
-                <a:spcPts val="1000"/>
-              </a:spcAft>
+            <a:pPr lvl="0" marL="457200" indent="-228600">
+              <a:buFont typeface="Calibri"/>
+              <a:spcAft>
+                <a:spcPts val="1000"/>
+              </a:spcAft>
+              <a:buSzPct val="100000"/>
               <a:buChar char="•"/>
               <a:lnSpc>
                 <a:spcPts val="2200"/>
@@ -18829,10 +19107,12 @@
             </a:r>
           </a:p>
           <a:p>
-            <a:pPr>
-              <a:spcAft>
-                <a:spcPts val="1000"/>
-              </a:spcAft>
+            <a:pPr lvl="0" marL="457200" indent="-228600">
+              <a:buFont typeface="Calibri"/>
+              <a:spcAft>
+                <a:spcPts val="1000"/>
+              </a:spcAft>
+              <a:buSzPct val="100000"/>
               <a:buChar char="•"/>
               <a:lnSpc>
                 <a:spcPts val="2200"/>
@@ -18849,10 +19129,12 @@
             </a:r>
           </a:p>
           <a:p>
-            <a:pPr>
-              <a:spcAft>
-                <a:spcPts val="1000"/>
-              </a:spcAft>
+            <a:pPr lvl="0" marL="457200" indent="-228600">
+              <a:buFont typeface="Calibri"/>
+              <a:spcAft>
+                <a:spcPts val="1000"/>
+              </a:spcAft>
+              <a:buSzPct val="100000"/>
               <a:buChar char="•"/>
               <a:lnSpc>
                 <a:spcPts val="2200"/>
@@ -18988,10 +19270,12 @@
           </a:bodyPr>
           <a:lstStyle/>
           <a:p>
-            <a:pPr>
-              <a:spcAft>
-                <a:spcPts val="1000"/>
-              </a:spcAft>
+            <a:pPr lvl="0" marL="457200" indent="-228600">
+              <a:buFont typeface="Calibri"/>
+              <a:spcAft>
+                <a:spcPts val="1000"/>
+              </a:spcAft>
+              <a:buSzPct val="100000"/>
               <a:buChar char="•"/>
               <a:lnSpc>
                 <a:spcPts val="2200"/>
@@ -19008,10 +19292,12 @@
             </a:r>
           </a:p>
           <a:p>
-            <a:pPr>
-              <a:spcAft>
-                <a:spcPts val="1000"/>
-              </a:spcAft>
+            <a:pPr lvl="0" marL="457200" indent="-228600">
+              <a:buFont typeface="Calibri"/>
+              <a:spcAft>
+                <a:spcPts val="1000"/>
+              </a:spcAft>
+              <a:buSzPct val="100000"/>
               <a:buChar char="•"/>
               <a:lnSpc>
                 <a:spcPts val="2200"/>
@@ -19028,10 +19314,12 @@
             </a:r>
           </a:p>
           <a:p>
-            <a:pPr>
-              <a:spcAft>
-                <a:spcPts val="1000"/>
-              </a:spcAft>
+            <a:pPr lvl="0" marL="457200" indent="-228600">
+              <a:buFont typeface="Calibri"/>
+              <a:spcAft>
+                <a:spcPts val="1000"/>
+              </a:spcAft>
+              <a:buSzPct val="100000"/>
               <a:buChar char="•"/>
               <a:lnSpc>
                 <a:spcPts val="2200"/>
@@ -19167,10 +19455,12 @@
           </a:bodyPr>
           <a:lstStyle/>
           <a:p>
-            <a:pPr>
-              <a:spcAft>
-                <a:spcPts val="1000"/>
-              </a:spcAft>
+            <a:pPr lvl="0" marL="457200" indent="-228600">
+              <a:buFont typeface="Calibri"/>
+              <a:spcAft>
+                <a:spcPts val="1000"/>
+              </a:spcAft>
+              <a:buSzPct val="100000"/>
               <a:buChar char="•"/>
               <a:lnSpc>
                 <a:spcPts val="2200"/>
@@ -19187,10 +19477,12 @@
             </a:r>
           </a:p>
           <a:p>
-            <a:pPr>
-              <a:spcAft>
-                <a:spcPts val="1000"/>
-              </a:spcAft>
+            <a:pPr lvl="0" marL="457200" indent="-228600">
+              <a:buFont typeface="Calibri"/>
+              <a:spcAft>
+                <a:spcPts val="1000"/>
+              </a:spcAft>
+              <a:buSzPct val="100000"/>
               <a:buChar char="•"/>
               <a:lnSpc>
                 <a:spcPts val="2200"/>
@@ -19326,10 +19618,12 @@
           </a:bodyPr>
           <a:lstStyle/>
           <a:p>
-            <a:pPr>
-              <a:spcAft>
-                <a:spcPts val="1000"/>
-              </a:spcAft>
+            <a:pPr lvl="0" marL="457200" indent="-228600">
+              <a:buFont typeface="Calibri"/>
+              <a:spcAft>
+                <a:spcPts val="1000"/>
+              </a:spcAft>
+              <a:buSzPct val="100000"/>
               <a:buChar char="•"/>
               <a:lnSpc>
                 <a:spcPts val="2200"/>
@@ -19346,10 +19640,12 @@
             </a:r>
           </a:p>
           <a:p>
-            <a:pPr>
-              <a:spcAft>
-                <a:spcPts val="1000"/>
-              </a:spcAft>
+            <a:pPr lvl="0" marL="457200" indent="-228600">
+              <a:buFont typeface="Calibri"/>
+              <a:spcAft>
+                <a:spcPts val="1000"/>
+              </a:spcAft>
+              <a:buSzPct val="100000"/>
               <a:buChar char="•"/>
               <a:lnSpc>
                 <a:spcPts val="2200"/>
@@ -19485,10 +19781,12 @@
           </a:bodyPr>
           <a:lstStyle/>
           <a:p>
-            <a:pPr>
-              <a:spcAft>
-                <a:spcPts val="1000"/>
-              </a:spcAft>
+            <a:pPr lvl="0" marL="457200" indent="-228600">
+              <a:buFont typeface="Calibri"/>
+              <a:spcAft>
+                <a:spcPts val="1000"/>
+              </a:spcAft>
+              <a:buSzPct val="100000"/>
               <a:buChar char="•"/>
               <a:lnSpc>
                 <a:spcPts val="2200"/>
@@ -19505,10 +19803,12 @@
             </a:r>
           </a:p>
           <a:p>
-            <a:pPr>
-              <a:spcAft>
-                <a:spcPts val="1000"/>
-              </a:spcAft>
+            <a:pPr lvl="0" marL="457200" indent="-228600">
+              <a:buFont typeface="Calibri"/>
+              <a:spcAft>
+                <a:spcPts val="1000"/>
+              </a:spcAft>
+              <a:buSzPct val="100000"/>
               <a:buChar char="•"/>
               <a:lnSpc>
                 <a:spcPts val="2200"/>
@@ -19525,10 +19825,12 @@
             </a:r>
           </a:p>
           <a:p>
-            <a:pPr>
-              <a:spcAft>
-                <a:spcPts val="1000"/>
-              </a:spcAft>
+            <a:pPr lvl="0" marL="457200" indent="-228600">
+              <a:buFont typeface="Calibri"/>
+              <a:spcAft>
+                <a:spcPts val="1000"/>
+              </a:spcAft>
+              <a:buSzPct val="100000"/>
               <a:buChar char="•"/>
               <a:lnSpc>
                 <a:spcPts val="2200"/>
@@ -19664,10 +19966,12 @@
           </a:bodyPr>
           <a:lstStyle/>
           <a:p>
-            <a:pPr>
-              <a:spcAft>
-                <a:spcPts val="1000"/>
-              </a:spcAft>
+            <a:pPr lvl="0" marL="457200" indent="-228600">
+              <a:buFont typeface="Calibri"/>
+              <a:spcAft>
+                <a:spcPts val="1000"/>
+              </a:spcAft>
+              <a:buSzPct val="100000"/>
               <a:buChar char="•"/>
               <a:lnSpc>
                 <a:spcPts val="2200"/>
@@ -19684,10 +19988,12 @@
             </a:r>
           </a:p>
           <a:p>
-            <a:pPr>
-              <a:spcAft>
-                <a:spcPts val="1000"/>
-              </a:spcAft>
+            <a:pPr lvl="0" marL="457200" indent="-228600">
+              <a:buFont typeface="Calibri"/>
+              <a:spcAft>
+                <a:spcPts val="1000"/>
+              </a:spcAft>
+              <a:buSzPct val="100000"/>
               <a:buChar char="•"/>
               <a:lnSpc>
                 <a:spcPts val="2200"/>
@@ -19704,10 +20010,12 @@
             </a:r>
           </a:p>
           <a:p>
-            <a:pPr>
-              <a:spcAft>
-                <a:spcPts val="1000"/>
-              </a:spcAft>
+            <a:pPr lvl="0" marL="457200" indent="-228600">
+              <a:buFont typeface="Calibri"/>
+              <a:spcAft>
+                <a:spcPts val="1000"/>
+              </a:spcAft>
+              <a:buSzPct val="100000"/>
               <a:buChar char="•"/>
               <a:lnSpc>
                 <a:spcPts val="2200"/>
@@ -19724,10 +20032,12 @@
             </a:r>
           </a:p>
           <a:p>
-            <a:pPr>
-              <a:spcAft>
-                <a:spcPts val="1000"/>
-              </a:spcAft>
+            <a:pPr lvl="0" marL="457200" indent="-228600">
+              <a:buFont typeface="Calibri"/>
+              <a:spcAft>
+                <a:spcPts val="1000"/>
+              </a:spcAft>
+              <a:buSzPct val="100000"/>
               <a:buChar char="•"/>
               <a:lnSpc>
                 <a:spcPts val="2200"/>
@@ -19863,10 +20173,12 @@
           </a:bodyPr>
           <a:lstStyle/>
           <a:p>
-            <a:pPr>
-              <a:spcAft>
-                <a:spcPts val="1000"/>
-              </a:spcAft>
+            <a:pPr lvl="0" marL="457200" indent="-228600">
+              <a:buFont typeface="Calibri"/>
+              <a:spcAft>
+                <a:spcPts val="1000"/>
+              </a:spcAft>
+              <a:buSzPct val="100000"/>
               <a:buChar char="•"/>
               <a:lnSpc>
                 <a:spcPts val="2200"/>
@@ -19883,10 +20195,12 @@
             </a:r>
           </a:p>
           <a:p>
-            <a:pPr>
-              <a:spcAft>
-                <a:spcPts val="1000"/>
-              </a:spcAft>
+            <a:pPr lvl="0" marL="457200" indent="-228600">
+              <a:buFont typeface="Calibri"/>
+              <a:spcAft>
+                <a:spcPts val="1000"/>
+              </a:spcAft>
+              <a:buSzPct val="100000"/>
               <a:buChar char="•"/>
               <a:lnSpc>
                 <a:spcPts val="2200"/>
@@ -19903,10 +20217,12 @@
             </a:r>
           </a:p>
           <a:p>
-            <a:pPr>
-              <a:spcAft>
-                <a:spcPts val="1000"/>
-              </a:spcAft>
+            <a:pPr lvl="0" marL="457200" indent="-228600">
+              <a:buFont typeface="Calibri"/>
+              <a:spcAft>
+                <a:spcPts val="1000"/>
+              </a:spcAft>
+              <a:buSzPct val="100000"/>
               <a:buChar char="•"/>
               <a:lnSpc>
                 <a:spcPts val="2200"/>
@@ -20042,10 +20358,12 @@
           </a:bodyPr>
           <a:lstStyle/>
           <a:p>
-            <a:pPr>
-              <a:spcAft>
-                <a:spcPts val="1000"/>
-              </a:spcAft>
+            <a:pPr lvl="0" marL="457200" indent="-228600">
+              <a:buFont typeface="Calibri"/>
+              <a:spcAft>
+                <a:spcPts val="1000"/>
+              </a:spcAft>
+              <a:buSzPct val="100000"/>
               <a:buChar char="•"/>
               <a:lnSpc>
                 <a:spcPts val="2200"/>
@@ -20062,10 +20380,12 @@
             </a:r>
           </a:p>
           <a:p>
-            <a:pPr>
-              <a:spcAft>
-                <a:spcPts val="1000"/>
-              </a:spcAft>
+            <a:pPr lvl="0" marL="457200" indent="-228600">
+              <a:buFont typeface="Calibri"/>
+              <a:spcAft>
+                <a:spcPts val="1000"/>
+              </a:spcAft>
+              <a:buSzPct val="100000"/>
               <a:buChar char="•"/>
               <a:lnSpc>
                 <a:spcPts val="2200"/>
@@ -20082,10 +20402,12 @@
             </a:r>
           </a:p>
           <a:p>
-            <a:pPr>
-              <a:spcAft>
-                <a:spcPts val="1000"/>
-              </a:spcAft>
+            <a:pPr lvl="0" marL="457200" indent="-228600">
+              <a:buFont typeface="Calibri"/>
+              <a:spcAft>
+                <a:spcPts val="1000"/>
+              </a:spcAft>
+              <a:buSzPct val="100000"/>
               <a:buChar char="•"/>
               <a:lnSpc>
                 <a:spcPts val="2200"/>
@@ -20102,10 +20424,12 @@
             </a:r>
           </a:p>
           <a:p>
-            <a:pPr>
-              <a:spcAft>
-                <a:spcPts val="1000"/>
-              </a:spcAft>
+            <a:pPr lvl="0" marL="457200" indent="-228600">
+              <a:buFont typeface="Calibri"/>
+              <a:spcAft>
+                <a:spcPts val="1000"/>
+              </a:spcAft>
+              <a:buSzPct val="100000"/>
               <a:buChar char="•"/>
               <a:lnSpc>
                 <a:spcPts val="2200"/>
@@ -20122,10 +20446,12 @@
             </a:r>
           </a:p>
           <a:p>
-            <a:pPr>
-              <a:spcAft>
-                <a:spcPts val="1000"/>
-              </a:spcAft>
+            <a:pPr lvl="0" marL="457200" indent="-228600">
+              <a:buFont typeface="Calibri"/>
+              <a:spcAft>
+                <a:spcPts val="1000"/>
+              </a:spcAft>
+              <a:buSzPct val="100000"/>
               <a:buChar char="•"/>
               <a:lnSpc>
                 <a:spcPts val="2200"/>
@@ -20261,10 +20587,12 @@
           </a:bodyPr>
           <a:lstStyle/>
           <a:p>
-            <a:pPr>
-              <a:spcAft>
-                <a:spcPts val="1000"/>
-              </a:spcAft>
+            <a:pPr lvl="0" marL="457200" indent="-228600">
+              <a:buFont typeface="Calibri"/>
+              <a:spcAft>
+                <a:spcPts val="1000"/>
+              </a:spcAft>
+              <a:buSzPct val="100000"/>
               <a:buChar char="•"/>
               <a:lnSpc>
                 <a:spcPts val="2200"/>
@@ -20281,10 +20609,12 @@
             </a:r>
           </a:p>
           <a:p>
-            <a:pPr>
-              <a:spcAft>
-                <a:spcPts val="1000"/>
-              </a:spcAft>
+            <a:pPr lvl="0" marL="457200" indent="-228600">
+              <a:buFont typeface="Calibri"/>
+              <a:spcAft>
+                <a:spcPts val="1000"/>
+              </a:spcAft>
+              <a:buSzPct val="100000"/>
               <a:buChar char="•"/>
               <a:lnSpc>
                 <a:spcPts val="2200"/>
@@ -20420,10 +20750,12 @@
           </a:bodyPr>
           <a:lstStyle/>
           <a:p>
-            <a:pPr>
-              <a:spcAft>
-                <a:spcPts val="1000"/>
-              </a:spcAft>
+            <a:pPr lvl="0" marL="457200" indent="-228600">
+              <a:buFont typeface="Calibri"/>
+              <a:spcAft>
+                <a:spcPts val="1000"/>
+              </a:spcAft>
+              <a:buSzPct val="100000"/>
               <a:buChar char="•"/>
               <a:lnSpc>
                 <a:spcPts val="2200"/>
@@ -20440,10 +20772,12 @@
             </a:r>
           </a:p>
           <a:p>
-            <a:pPr>
-              <a:spcAft>
-                <a:spcPts val="1000"/>
-              </a:spcAft>
+            <a:pPr lvl="0" marL="457200" indent="-228600">
+              <a:buFont typeface="Calibri"/>
+              <a:spcAft>
+                <a:spcPts val="1000"/>
+              </a:spcAft>
+              <a:buSzPct val="100000"/>
               <a:buChar char="•"/>
               <a:lnSpc>
                 <a:spcPts val="2200"/>
@@ -20460,10 +20794,12 @@
             </a:r>
           </a:p>
           <a:p>
-            <a:pPr>
-              <a:spcAft>
-                <a:spcPts val="1000"/>
-              </a:spcAft>
+            <a:pPr lvl="0" marL="457200" indent="-228600">
+              <a:buFont typeface="Calibri"/>
+              <a:spcAft>
+                <a:spcPts val="1000"/>
+              </a:spcAft>
+              <a:buSzPct val="100000"/>
               <a:buChar char="•"/>
               <a:lnSpc>
                 <a:spcPts val="2200"/>
@@ -20599,10 +20935,12 @@
           </a:bodyPr>
           <a:lstStyle/>
           <a:p>
-            <a:pPr>
-              <a:spcAft>
-                <a:spcPts val="1000"/>
-              </a:spcAft>
+            <a:pPr lvl="0" marL="457200" indent="-228600">
+              <a:buFont typeface="Calibri"/>
+              <a:spcAft>
+                <a:spcPts val="1000"/>
+              </a:spcAft>
+              <a:buSzPct val="100000"/>
               <a:buChar char="•"/>
               <a:lnSpc>
                 <a:spcPts val="2200"/>
@@ -20619,10 +20957,12 @@
             </a:r>
           </a:p>
           <a:p>
-            <a:pPr>
-              <a:spcAft>
-                <a:spcPts val="1000"/>
-              </a:spcAft>
+            <a:pPr lvl="0" marL="457200" indent="-228600">
+              <a:buFont typeface="Calibri"/>
+              <a:spcAft>
+                <a:spcPts val="1000"/>
+              </a:spcAft>
+              <a:buSzPct val="100000"/>
               <a:buChar char="•"/>
               <a:lnSpc>
                 <a:spcPts val="2200"/>
@@ -20639,10 +20979,12 @@
             </a:r>
           </a:p>
           <a:p>
-            <a:pPr>
-              <a:spcAft>
-                <a:spcPts val="1000"/>
-              </a:spcAft>
+            <a:pPr lvl="0" marL="457200" indent="-228600">
+              <a:buFont typeface="Calibri"/>
+              <a:spcAft>
+                <a:spcPts val="1000"/>
+              </a:spcAft>
+              <a:buSzPct val="100000"/>
               <a:buChar char="•"/>
               <a:lnSpc>
                 <a:spcPts val="2200"/>
@@ -20778,10 +21120,12 @@
           </a:bodyPr>
           <a:lstStyle/>
           <a:p>
-            <a:pPr>
-              <a:spcAft>
-                <a:spcPts val="1000"/>
-              </a:spcAft>
+            <a:pPr lvl="0" marL="457200" indent="-228600">
+              <a:buFont typeface="Calibri"/>
+              <a:spcAft>
+                <a:spcPts val="1000"/>
+              </a:spcAft>
+              <a:buSzPct val="100000"/>
               <a:buChar char="•"/>
               <a:lnSpc>
                 <a:spcPts val="2200"/>
@@ -20798,10 +21142,12 @@
             </a:r>
           </a:p>
           <a:p>
-            <a:pPr>
-              <a:spcAft>
-                <a:spcPts val="1000"/>
-              </a:spcAft>
+            <a:pPr lvl="0" marL="457200" indent="-228600">
+              <a:buFont typeface="Calibri"/>
+              <a:spcAft>
+                <a:spcPts val="1000"/>
+              </a:spcAft>
+              <a:buSzPct val="100000"/>
               <a:buChar char="•"/>
               <a:lnSpc>
                 <a:spcPts val="2200"/>
@@ -20937,10 +21283,12 @@
           </a:bodyPr>
           <a:lstStyle/>
           <a:p>
-            <a:pPr>
-              <a:spcAft>
-                <a:spcPts val="1000"/>
-              </a:spcAft>
+            <a:pPr lvl="0" marL="457200" indent="-228600">
+              <a:buFont typeface="Calibri"/>
+              <a:spcAft>
+                <a:spcPts val="1000"/>
+              </a:spcAft>
+              <a:buSzPct val="100000"/>
               <a:buChar char="•"/>
               <a:lnSpc>
                 <a:spcPts val="2200"/>
@@ -20957,10 +21305,12 @@
             </a:r>
           </a:p>
           <a:p>
-            <a:pPr>
-              <a:spcAft>
-                <a:spcPts val="1000"/>
-              </a:spcAft>
+            <a:pPr lvl="0" marL="457200" indent="-228600">
+              <a:buFont typeface="Calibri"/>
+              <a:spcAft>
+                <a:spcPts val="1000"/>
+              </a:spcAft>
+              <a:buSzPct val="100000"/>
               <a:buChar char="•"/>
               <a:lnSpc>
                 <a:spcPts val="2200"/>
@@ -21096,10 +21446,12 @@
           </a:bodyPr>
           <a:lstStyle/>
           <a:p>
-            <a:pPr>
-              <a:spcAft>
-                <a:spcPts val="1000"/>
-              </a:spcAft>
+            <a:pPr lvl="0" marL="457200" indent="-228600">
+              <a:buFont typeface="Calibri"/>
+              <a:spcAft>
+                <a:spcPts val="1000"/>
+              </a:spcAft>
+              <a:buSzPct val="100000"/>
               <a:buChar char="•"/>
               <a:lnSpc>
                 <a:spcPts val="2200"/>
@@ -21116,10 +21468,12 @@
             </a:r>
           </a:p>
           <a:p>
-            <a:pPr>
-              <a:spcAft>
-                <a:spcPts val="1000"/>
-              </a:spcAft>
+            <a:pPr lvl="0" marL="457200" indent="-228600">
+              <a:buFont typeface="Calibri"/>
+              <a:spcAft>
+                <a:spcPts val="1000"/>
+              </a:spcAft>
+              <a:buSzPct val="100000"/>
               <a:buChar char="•"/>
               <a:lnSpc>
                 <a:spcPts val="2200"/>
@@ -21136,10 +21490,12 @@
             </a:r>
           </a:p>
           <a:p>
-            <a:pPr>
-              <a:spcAft>
-                <a:spcPts val="1000"/>
-              </a:spcAft>
+            <a:pPr lvl="0" marL="457200" indent="-228600">
+              <a:buFont typeface="Calibri"/>
+              <a:spcAft>
+                <a:spcPts val="1000"/>
+              </a:spcAft>
+              <a:buSzPct val="100000"/>
               <a:buChar char="•"/>
               <a:lnSpc>
                 <a:spcPts val="2200"/>
@@ -21275,10 +21631,12 @@
           </a:bodyPr>
           <a:lstStyle/>
           <a:p>
-            <a:pPr>
-              <a:spcAft>
-                <a:spcPts val="1000"/>
-              </a:spcAft>
+            <a:pPr lvl="0" marL="457200" indent="-228600">
+              <a:buFont typeface="Calibri"/>
+              <a:spcAft>
+                <a:spcPts val="1000"/>
+              </a:spcAft>
+              <a:buSzPct val="100000"/>
               <a:buChar char="•"/>
               <a:lnSpc>
                 <a:spcPts val="2200"/>
@@ -21295,10 +21653,12 @@
             </a:r>
           </a:p>
           <a:p>
-            <a:pPr>
-              <a:spcAft>
-                <a:spcPts val="1000"/>
-              </a:spcAft>
+            <a:pPr lvl="0" marL="457200" indent="-228600">
+              <a:buFont typeface="Calibri"/>
+              <a:spcAft>
+                <a:spcPts val="1000"/>
+              </a:spcAft>
+              <a:buSzPct val="100000"/>
               <a:buChar char="•"/>
               <a:lnSpc>
                 <a:spcPts val="2200"/>
@@ -21315,10 +21675,12 @@
             </a:r>
           </a:p>
           <a:p>
-            <a:pPr>
-              <a:spcAft>
-                <a:spcPts val="1000"/>
-              </a:spcAft>
+            <a:pPr lvl="0" marL="457200" indent="-228600">
+              <a:buFont typeface="Calibri"/>
+              <a:spcAft>
+                <a:spcPts val="1000"/>
+              </a:spcAft>
+              <a:buSzPct val="100000"/>
               <a:buChar char="•"/>
               <a:lnSpc>
                 <a:spcPts val="2200"/>
@@ -21454,10 +21816,12 @@
           </a:bodyPr>
           <a:lstStyle/>
           <a:p>
-            <a:pPr>
-              <a:spcAft>
-                <a:spcPts val="1000"/>
-              </a:spcAft>
+            <a:pPr lvl="0" marL="457200" indent="-228600">
+              <a:buFont typeface="Calibri"/>
+              <a:spcAft>
+                <a:spcPts val="1000"/>
+              </a:spcAft>
+              <a:buSzPct val="100000"/>
               <a:buChar char="•"/>
               <a:lnSpc>
                 <a:spcPts val="2200"/>
@@ -21474,10 +21838,12 @@
             </a:r>
           </a:p>
           <a:p>
-            <a:pPr>
-              <a:spcAft>
-                <a:spcPts val="1000"/>
-              </a:spcAft>
+            <a:pPr lvl="0" marL="457200" indent="-228600">
+              <a:buFont typeface="Calibri"/>
+              <a:spcAft>
+                <a:spcPts val="1000"/>
+              </a:spcAft>
+              <a:buSzPct val="100000"/>
               <a:buChar char="•"/>
               <a:lnSpc>
                 <a:spcPts val="2200"/>
@@ -21494,10 +21860,12 @@
             </a:r>
           </a:p>
           <a:p>
-            <a:pPr>
-              <a:spcAft>
-                <a:spcPts val="1000"/>
-              </a:spcAft>
+            <a:pPr lvl="0" marL="457200" indent="-228600">
+              <a:buFont typeface="Calibri"/>
+              <a:spcAft>
+                <a:spcPts val="1000"/>
+              </a:spcAft>
+              <a:buSzPct val="100000"/>
               <a:buChar char="•"/>
               <a:lnSpc>
                 <a:spcPts val="2200"/>
@@ -21514,10 +21882,12 @@
             </a:r>
           </a:p>
           <a:p>
-            <a:pPr>
-              <a:spcAft>
-                <a:spcPts val="1000"/>
-              </a:spcAft>
+            <a:pPr lvl="0" marL="457200" indent="-228600">
+              <a:buFont typeface="Calibri"/>
+              <a:spcAft>
+                <a:spcPts val="1000"/>
+              </a:spcAft>
+              <a:buSzPct val="100000"/>
               <a:buChar char="•"/>
               <a:lnSpc>
                 <a:spcPts val="2200"/>
@@ -21653,10 +22023,12 @@
           </a:bodyPr>
           <a:lstStyle/>
           <a:p>
-            <a:pPr>
-              <a:spcAft>
-                <a:spcPts val="1000"/>
-              </a:spcAft>
+            <a:pPr lvl="0" marL="457200" indent="-228600">
+              <a:buFont typeface="Calibri"/>
+              <a:spcAft>
+                <a:spcPts val="1000"/>
+              </a:spcAft>
+              <a:buSzPct val="100000"/>
               <a:buChar char="•"/>
               <a:lnSpc>
                 <a:spcPts val="2200"/>
@@ -21673,10 +22045,12 @@
             </a:r>
           </a:p>
           <a:p>
-            <a:pPr>
-              <a:spcAft>
-                <a:spcPts val="1000"/>
-              </a:spcAft>
+            <a:pPr lvl="0" marL="457200" indent="-228600">
+              <a:buFont typeface="Calibri"/>
+              <a:spcAft>
+                <a:spcPts val="1000"/>
+              </a:spcAft>
+              <a:buSzPct val="100000"/>
               <a:buChar char="•"/>
               <a:lnSpc>
                 <a:spcPts val="2200"/>
@@ -21693,10 +22067,12 @@
             </a:r>
           </a:p>
           <a:p>
-            <a:pPr>
-              <a:spcAft>
-                <a:spcPts val="1000"/>
-              </a:spcAft>
+            <a:pPr lvl="0" marL="457200" indent="-228600">
+              <a:buFont typeface="Calibri"/>
+              <a:spcAft>
+                <a:spcPts val="1000"/>
+              </a:spcAft>
+              <a:buSzPct val="100000"/>
               <a:buChar char="•"/>
               <a:lnSpc>
                 <a:spcPts val="2200"/>
@@ -21832,10 +22208,12 @@
           </a:bodyPr>
           <a:lstStyle/>
           <a:p>
-            <a:pPr>
-              <a:spcAft>
-                <a:spcPts val="1000"/>
-              </a:spcAft>
+            <a:pPr lvl="0" marL="457200" indent="-228600">
+              <a:buFont typeface="Calibri"/>
+              <a:spcAft>
+                <a:spcPts val="1000"/>
+              </a:spcAft>
+              <a:buSzPct val="100000"/>
               <a:buChar char="•"/>
               <a:lnSpc>
                 <a:spcPts val="2200"/>
@@ -21852,10 +22230,12 @@
             </a:r>
           </a:p>
           <a:p>
-            <a:pPr>
-              <a:spcAft>
-                <a:spcPts val="1000"/>
-              </a:spcAft>
+            <a:pPr lvl="0" marL="457200" indent="-228600">
+              <a:buFont typeface="Calibri"/>
+              <a:spcAft>
+                <a:spcPts val="1000"/>
+              </a:spcAft>
+              <a:buSzPct val="100000"/>
               <a:buChar char="•"/>
               <a:lnSpc>
                 <a:spcPts val="2200"/>
@@ -21872,10 +22252,12 @@
             </a:r>
           </a:p>
           <a:p>
-            <a:pPr>
-              <a:spcAft>
-                <a:spcPts val="1000"/>
-              </a:spcAft>
+            <a:pPr lvl="0" marL="457200" indent="-228600">
+              <a:buFont typeface="Calibri"/>
+              <a:spcAft>
+                <a:spcPts val="1000"/>
+              </a:spcAft>
+              <a:buSzPct val="100000"/>
               <a:buChar char="•"/>
               <a:lnSpc>
                 <a:spcPts val="2200"/>
@@ -21892,10 +22274,12 @@
             </a:r>
           </a:p>
           <a:p>
-            <a:pPr>
-              <a:spcAft>
-                <a:spcPts val="1000"/>
-              </a:spcAft>
+            <a:pPr lvl="0" marL="457200" indent="-228600">
+              <a:buFont typeface="Calibri"/>
+              <a:spcAft>
+                <a:spcPts val="1000"/>
+              </a:spcAft>
+              <a:buSzPct val="100000"/>
               <a:buChar char="•"/>
               <a:lnSpc>
                 <a:spcPts val="2200"/>
@@ -22031,10 +22415,12 @@
           </a:bodyPr>
           <a:lstStyle/>
           <a:p>
-            <a:pPr>
-              <a:spcAft>
-                <a:spcPts val="1000"/>
-              </a:spcAft>
+            <a:pPr lvl="0" marL="457200" indent="-228600">
+              <a:buFont typeface="Calibri"/>
+              <a:spcAft>
+                <a:spcPts val="1000"/>
+              </a:spcAft>
+              <a:buSzPct val="100000"/>
               <a:buChar char="•"/>
               <a:lnSpc>
                 <a:spcPts val="2200"/>
@@ -22051,10 +22437,12 @@
             </a:r>
           </a:p>
           <a:p>
-            <a:pPr>
-              <a:spcAft>
-                <a:spcPts val="1000"/>
-              </a:spcAft>
+            <a:pPr lvl="0" marL="457200" indent="-228600">
+              <a:buFont typeface="Calibri"/>
+              <a:spcAft>
+                <a:spcPts val="1000"/>
+              </a:spcAft>
+              <a:buSzPct val="100000"/>
               <a:buChar char="•"/>
               <a:lnSpc>
                 <a:spcPts val="2200"/>
@@ -22071,10 +22459,12 @@
             </a:r>
           </a:p>
           <a:p>
-            <a:pPr>
-              <a:spcAft>
-                <a:spcPts val="1000"/>
-              </a:spcAft>
+            <a:pPr lvl="0" marL="457200" indent="-228600">
+              <a:buFont typeface="Calibri"/>
+              <a:spcAft>
+                <a:spcPts val="1000"/>
+              </a:spcAft>
+              <a:buSzPct val="100000"/>
               <a:buChar char="•"/>
               <a:lnSpc>
                 <a:spcPts val="2200"/>
@@ -22210,10 +22600,12 @@
           </a:bodyPr>
           <a:lstStyle/>
           <a:p>
-            <a:pPr>
-              <a:spcAft>
-                <a:spcPts val="1000"/>
-              </a:spcAft>
+            <a:pPr lvl="0" marL="457200" indent="-228600">
+              <a:buFont typeface="Calibri"/>
+              <a:spcAft>
+                <a:spcPts val="1000"/>
+              </a:spcAft>
+              <a:buSzPct val="100000"/>
               <a:buChar char="•"/>
               <a:lnSpc>
                 <a:spcPts val="2200"/>
@@ -22230,10 +22622,12 @@
             </a:r>
           </a:p>
           <a:p>
-            <a:pPr>
-              <a:spcAft>
-                <a:spcPts val="1000"/>
-              </a:spcAft>
+            <a:pPr lvl="0" marL="457200" indent="-228600">
+              <a:buFont typeface="Calibri"/>
+              <a:spcAft>
+                <a:spcPts val="1000"/>
+              </a:spcAft>
+              <a:buSzPct val="100000"/>
               <a:buChar char="•"/>
               <a:lnSpc>
                 <a:spcPts val="2200"/>
@@ -22250,10 +22644,12 @@
             </a:r>
           </a:p>
           <a:p>
-            <a:pPr>
-              <a:spcAft>
-                <a:spcPts val="1000"/>
-              </a:spcAft>
+            <a:pPr lvl="0" marL="457200" indent="-228600">
+              <a:buFont typeface="Calibri"/>
+              <a:spcAft>
+                <a:spcPts val="1000"/>
+              </a:spcAft>
+              <a:buSzPct val="100000"/>
               <a:buChar char="•"/>
               <a:lnSpc>
                 <a:spcPts val="2200"/>
@@ -22389,10 +22785,12 @@
           </a:bodyPr>
           <a:lstStyle/>
           <a:p>
-            <a:pPr>
-              <a:spcAft>
-                <a:spcPts val="1000"/>
-              </a:spcAft>
+            <a:pPr lvl="0" marL="457200" indent="-228600">
+              <a:buFont typeface="Calibri"/>
+              <a:spcAft>
+                <a:spcPts val="1000"/>
+              </a:spcAft>
+              <a:buSzPct val="100000"/>
               <a:buChar char="•"/>
               <a:lnSpc>
                 <a:spcPts val="2200"/>
@@ -22409,10 +22807,12 @@
             </a:r>
           </a:p>
           <a:p>
-            <a:pPr>
-              <a:spcAft>
-                <a:spcPts val="1000"/>
-              </a:spcAft>
+            <a:pPr lvl="0" marL="457200" indent="-228600">
+              <a:buFont typeface="Calibri"/>
+              <a:spcAft>
+                <a:spcPts val="1000"/>
+              </a:spcAft>
+              <a:buSzPct val="100000"/>
               <a:buChar char="•"/>
               <a:lnSpc>
                 <a:spcPts val="2200"/>
@@ -22548,10 +22948,12 @@
           </a:bodyPr>
           <a:lstStyle/>
           <a:p>
-            <a:pPr>
-              <a:spcAft>
-                <a:spcPts val="1000"/>
-              </a:spcAft>
+            <a:pPr lvl="0" marL="457200" indent="-228600">
+              <a:buFont typeface="Calibri"/>
+              <a:spcAft>
+                <a:spcPts val="1000"/>
+              </a:spcAft>
+              <a:buSzPct val="100000"/>
               <a:buChar char="•"/>
               <a:lnSpc>
                 <a:spcPts val="2200"/>
@@ -22568,10 +22970,12 @@
             </a:r>
           </a:p>
           <a:p>
-            <a:pPr>
-              <a:spcAft>
-                <a:spcPts val="1000"/>
-              </a:spcAft>
+            <a:pPr lvl="0" marL="457200" indent="-228600">
+              <a:buFont typeface="Calibri"/>
+              <a:spcAft>
+                <a:spcPts val="1000"/>
+              </a:spcAft>
+              <a:buSzPct val="100000"/>
               <a:buChar char="•"/>
               <a:lnSpc>
                 <a:spcPts val="2200"/>
@@ -22588,10 +22992,12 @@
             </a:r>
           </a:p>
           <a:p>
-            <a:pPr>
-              <a:spcAft>
-                <a:spcPts val="1000"/>
-              </a:spcAft>
+            <a:pPr lvl="0" marL="457200" indent="-228600">
+              <a:buFont typeface="Calibri"/>
+              <a:spcAft>
+                <a:spcPts val="1000"/>
+              </a:spcAft>
+              <a:buSzPct val="100000"/>
               <a:buChar char="•"/>
               <a:lnSpc>
                 <a:spcPts val="2200"/>
@@ -22727,10 +23133,12 @@
           </a:bodyPr>
           <a:lstStyle/>
           <a:p>
-            <a:pPr>
-              <a:spcAft>
-                <a:spcPts val="1000"/>
-              </a:spcAft>
+            <a:pPr lvl="0" marL="457200" indent="-228600">
+              <a:buFont typeface="Calibri"/>
+              <a:spcAft>
+                <a:spcPts val="1000"/>
+              </a:spcAft>
+              <a:buSzPct val="100000"/>
               <a:buChar char="•"/>
               <a:lnSpc>
                 <a:spcPts val="2200"/>
@@ -22747,10 +23155,12 @@
             </a:r>
           </a:p>
           <a:p>
-            <a:pPr>
-              <a:spcAft>
-                <a:spcPts val="1000"/>
-              </a:spcAft>
+            <a:pPr lvl="0" marL="457200" indent="-228600">
+              <a:buFont typeface="Calibri"/>
+              <a:spcAft>
+                <a:spcPts val="1000"/>
+              </a:spcAft>
+              <a:buSzPct val="100000"/>
               <a:buChar char="•"/>
               <a:lnSpc>
                 <a:spcPts val="2200"/>
@@ -22767,10 +23177,12 @@
             </a:r>
           </a:p>
           <a:p>
-            <a:pPr>
-              <a:spcAft>
-                <a:spcPts val="1000"/>
-              </a:spcAft>
+            <a:pPr lvl="0" marL="457200" indent="-228600">
+              <a:buFont typeface="Calibri"/>
+              <a:spcAft>
+                <a:spcPts val="1000"/>
+              </a:spcAft>
+              <a:buSzPct val="100000"/>
               <a:buChar char="•"/>
               <a:lnSpc>
                 <a:spcPts val="2200"/>
@@ -22906,10 +23318,12 @@
           </a:bodyPr>
           <a:lstStyle/>
           <a:p>
-            <a:pPr>
-              <a:spcAft>
-                <a:spcPts val="1000"/>
-              </a:spcAft>
+            <a:pPr lvl="0" marL="457200" indent="-228600">
+              <a:buFont typeface="Calibri"/>
+              <a:spcAft>
+                <a:spcPts val="1000"/>
+              </a:spcAft>
+              <a:buSzPct val="100000"/>
               <a:buChar char="•"/>
               <a:lnSpc>
                 <a:spcPts val="2200"/>
@@ -22926,10 +23340,12 @@
             </a:r>
           </a:p>
           <a:p>
-            <a:pPr>
-              <a:spcAft>
-                <a:spcPts val="1000"/>
-              </a:spcAft>
+            <a:pPr lvl="0" marL="457200" indent="-228600">
+              <a:buFont typeface="Calibri"/>
+              <a:spcAft>
+                <a:spcPts val="1000"/>
+              </a:spcAft>
+              <a:buSzPct val="100000"/>
               <a:buChar char="•"/>
               <a:lnSpc>
                 <a:spcPts val="2200"/>
@@ -22946,10 +23362,12 @@
             </a:r>
           </a:p>
           <a:p>
-            <a:pPr>
-              <a:spcAft>
-                <a:spcPts val="1000"/>
-              </a:spcAft>
+            <a:pPr lvl="0" marL="457200" indent="-228600">
+              <a:buFont typeface="Calibri"/>
+              <a:spcAft>
+                <a:spcPts val="1000"/>
+              </a:spcAft>
+              <a:buSzPct val="100000"/>
               <a:buChar char="•"/>
               <a:lnSpc>
                 <a:spcPts val="2200"/>
@@ -22966,10 +23384,12 @@
             </a:r>
           </a:p>
           <a:p>
-            <a:pPr>
-              <a:spcAft>
-                <a:spcPts val="1000"/>
-              </a:spcAft>
+            <a:pPr lvl="0" marL="457200" indent="-228600">
+              <a:buFont typeface="Calibri"/>
+              <a:spcAft>
+                <a:spcPts val="1000"/>
+              </a:spcAft>
+              <a:buSzPct val="100000"/>
               <a:buChar char="•"/>
               <a:lnSpc>
                 <a:spcPts val="2200"/>
@@ -23302,10 +23722,12 @@
           </a:bodyPr>
           <a:lstStyle/>
           <a:p>
-            <a:pPr>
-              <a:spcAft>
-                <a:spcPts val="1000"/>
-              </a:spcAft>
+            <a:pPr lvl="0" marL="457200" indent="-228600">
+              <a:buFont typeface="Calibri"/>
+              <a:spcAft>
+                <a:spcPts val="1000"/>
+              </a:spcAft>
+              <a:buSzPct val="100000"/>
               <a:buChar char="•"/>
               <a:lnSpc>
                 <a:spcPts val="2200"/>
@@ -23322,10 +23744,12 @@
             </a:r>
           </a:p>
           <a:p>
-            <a:pPr>
-              <a:spcAft>
-                <a:spcPts val="1000"/>
-              </a:spcAft>
+            <a:pPr lvl="0" marL="457200" indent="-228600">
+              <a:buFont typeface="Calibri"/>
+              <a:spcAft>
+                <a:spcPts val="1000"/>
+              </a:spcAft>
+              <a:buSzPct val="100000"/>
               <a:buChar char="•"/>
               <a:lnSpc>
                 <a:spcPts val="2200"/>
@@ -23342,10 +23766,12 @@
             </a:r>
           </a:p>
           <a:p>
-            <a:pPr>
-              <a:spcAft>
-                <a:spcPts val="1000"/>
-              </a:spcAft>
+            <a:pPr lvl="0" marL="457200" indent="-228600">
+              <a:buFont typeface="Calibri"/>
+              <a:spcAft>
+                <a:spcPts val="1000"/>
+              </a:spcAft>
+              <a:buSzPct val="100000"/>
               <a:buChar char="•"/>
               <a:lnSpc>
                 <a:spcPts val="2200"/>
@@ -23481,10 +23907,12 @@
           </a:bodyPr>
           <a:lstStyle/>
           <a:p>
-            <a:pPr>
-              <a:spcAft>
-                <a:spcPts val="1000"/>
-              </a:spcAft>
+            <a:pPr lvl="0" marL="457200" indent="-228600">
+              <a:buFont typeface="Calibri"/>
+              <a:spcAft>
+                <a:spcPts val="1000"/>
+              </a:spcAft>
+              <a:buSzPct val="100000"/>
               <a:buChar char="•"/>
               <a:lnSpc>
                 <a:spcPts val="2200"/>
@@ -23501,10 +23929,12 @@
             </a:r>
           </a:p>
           <a:p>
-            <a:pPr>
-              <a:spcAft>
-                <a:spcPts val="1000"/>
-              </a:spcAft>
+            <a:pPr lvl="0" marL="457200" indent="-228600">
+              <a:buFont typeface="Calibri"/>
+              <a:spcAft>
+                <a:spcPts val="1000"/>
+              </a:spcAft>
+              <a:buSzPct val="100000"/>
               <a:buChar char="•"/>
               <a:lnSpc>
                 <a:spcPts val="2200"/>
@@ -23521,10 +23951,12 @@
             </a:r>
           </a:p>
           <a:p>
-            <a:pPr>
-              <a:spcAft>
-                <a:spcPts val="1000"/>
-              </a:spcAft>
+            <a:pPr lvl="0" marL="457200" indent="-228600">
+              <a:buFont typeface="Calibri"/>
+              <a:spcAft>
+                <a:spcPts val="1000"/>
+              </a:spcAft>
+              <a:buSzPct val="100000"/>
               <a:buChar char="•"/>
               <a:lnSpc>
                 <a:spcPts val="2200"/>
@@ -23541,10 +23973,12 @@
             </a:r>
           </a:p>
           <a:p>
-            <a:pPr>
-              <a:spcAft>
-                <a:spcPts val="1000"/>
-              </a:spcAft>
+            <a:pPr lvl="0" marL="457200" indent="-228600">
+              <a:buFont typeface="Calibri"/>
+              <a:spcAft>
+                <a:spcPts val="1000"/>
+              </a:spcAft>
+              <a:buSzPct val="100000"/>
               <a:buChar char="•"/>
               <a:lnSpc>
                 <a:spcPts val="2200"/>
@@ -24124,10 +24558,12 @@
           </a:bodyPr>
           <a:lstStyle/>
           <a:p>
-            <a:pPr>
-              <a:spcAft>
-                <a:spcPts val="1000"/>
-              </a:spcAft>
+            <a:pPr lvl="0" marL="457200" indent="-228600">
+              <a:buFont typeface="Calibri"/>
+              <a:spcAft>
+                <a:spcPts val="1000"/>
+              </a:spcAft>
+              <a:buSzPct val="100000"/>
               <a:buChar char="•"/>
               <a:lnSpc>
                 <a:spcPts val="2200"/>
@@ -24144,10 +24580,12 @@
             </a:r>
           </a:p>
           <a:p>
-            <a:pPr>
-              <a:spcAft>
-                <a:spcPts val="1000"/>
-              </a:spcAft>
+            <a:pPr lvl="0" marL="457200" indent="-228600">
+              <a:buFont typeface="Calibri"/>
+              <a:spcAft>
+                <a:spcPts val="1000"/>
+              </a:spcAft>
+              <a:buSzPct val="100000"/>
               <a:buChar char="•"/>
               <a:lnSpc>
                 <a:spcPts val="2200"/>
@@ -24164,10 +24602,12 @@
             </a:r>
           </a:p>
           <a:p>
-            <a:pPr>
-              <a:spcAft>
-                <a:spcPts val="1000"/>
-              </a:spcAft>
+            <a:pPr lvl="0" marL="457200" indent="-228600">
+              <a:buFont typeface="Calibri"/>
+              <a:spcAft>
+                <a:spcPts val="1000"/>
+              </a:spcAft>
+              <a:buSzPct val="100000"/>
               <a:buChar char="•"/>
               <a:lnSpc>
                 <a:spcPts val="2200"/>
@@ -24303,10 +24743,12 @@
           </a:bodyPr>
           <a:lstStyle/>
           <a:p>
-            <a:pPr>
-              <a:spcAft>
-                <a:spcPts val="1000"/>
-              </a:spcAft>
+            <a:pPr lvl="0" marL="457200" indent="-228600">
+              <a:buFont typeface="Calibri"/>
+              <a:spcAft>
+                <a:spcPts val="1000"/>
+              </a:spcAft>
+              <a:buSzPct val="100000"/>
               <a:buChar char="•"/>
               <a:lnSpc>
                 <a:spcPts val="2200"/>
@@ -24323,10 +24765,12 @@
             </a:r>
           </a:p>
           <a:p>
-            <a:pPr>
-              <a:spcAft>
-                <a:spcPts val="1000"/>
-              </a:spcAft>
+            <a:pPr lvl="0" marL="457200" indent="-228600">
+              <a:buFont typeface="Calibri"/>
+              <a:spcAft>
+                <a:spcPts val="1000"/>
+              </a:spcAft>
+              <a:buSzPct val="100000"/>
               <a:buChar char="•"/>
               <a:lnSpc>
                 <a:spcPts val="2200"/>
@@ -24343,10 +24787,12 @@
             </a:r>
           </a:p>
           <a:p>
-            <a:pPr>
-              <a:spcAft>
-                <a:spcPts val="1000"/>
-              </a:spcAft>
+            <a:pPr lvl="0" marL="457200" indent="-228600">
+              <a:buFont typeface="Calibri"/>
+              <a:spcAft>
+                <a:spcPts val="1000"/>
+              </a:spcAft>
+              <a:buSzPct val="100000"/>
               <a:buChar char="•"/>
               <a:lnSpc>
                 <a:spcPts val="2200"/>
@@ -24363,10 +24809,12 @@
             </a:r>
           </a:p>
           <a:p>
-            <a:pPr>
-              <a:spcAft>
-                <a:spcPts val="1000"/>
-              </a:spcAft>
+            <a:pPr lvl="0" marL="457200" indent="-228600">
+              <a:buFont typeface="Calibri"/>
+              <a:spcAft>
+                <a:spcPts val="1000"/>
+              </a:spcAft>
+              <a:buSzPct val="100000"/>
               <a:buChar char="•"/>
               <a:lnSpc>
                 <a:spcPts val="2200"/>
@@ -24383,10 +24831,12 @@
             </a:r>
           </a:p>
           <a:p>
-            <a:pPr>
-              <a:spcAft>
-                <a:spcPts val="1000"/>
-              </a:spcAft>
+            <a:pPr lvl="0" marL="457200" indent="-228600">
+              <a:buFont typeface="Calibri"/>
+              <a:spcAft>
+                <a:spcPts val="1000"/>
+              </a:spcAft>
+              <a:buSzPct val="100000"/>
               <a:buChar char="•"/>
               <a:lnSpc>
                 <a:spcPts val="2200"/>
@@ -24522,10 +24972,12 @@
           </a:bodyPr>
           <a:lstStyle/>
           <a:p>
-            <a:pPr>
-              <a:spcAft>
-                <a:spcPts val="1000"/>
-              </a:spcAft>
+            <a:pPr lvl="0" marL="457200" indent="-228600">
+              <a:buFont typeface="Calibri"/>
+              <a:spcAft>
+                <a:spcPts val="1000"/>
+              </a:spcAft>
+              <a:buSzPct val="100000"/>
               <a:buChar char="•"/>
               <a:lnSpc>
                 <a:spcPts val="2200"/>
@@ -24542,10 +24994,12 @@
             </a:r>
           </a:p>
           <a:p>
-            <a:pPr>
-              <a:spcAft>
-                <a:spcPts val="1000"/>
-              </a:spcAft>
+            <a:pPr lvl="0" marL="457200" indent="-228600">
+              <a:buFont typeface="Calibri"/>
+              <a:spcAft>
+                <a:spcPts val="1000"/>
+              </a:spcAft>
+              <a:buSzPct val="100000"/>
               <a:buChar char="•"/>
               <a:lnSpc>
                 <a:spcPts val="2200"/>
@@ -24562,10 +25016,12 @@
             </a:r>
           </a:p>
           <a:p>
-            <a:pPr>
-              <a:spcAft>
-                <a:spcPts val="1000"/>
-              </a:spcAft>
+            <a:pPr lvl="0" marL="457200" indent="-228600">
+              <a:buFont typeface="Calibri"/>
+              <a:spcAft>
+                <a:spcPts val="1000"/>
+              </a:spcAft>
+              <a:buSzPct val="100000"/>
               <a:buChar char="•"/>
               <a:lnSpc>
                 <a:spcPts val="2200"/>
@@ -24701,10 +25157,12 @@
           </a:bodyPr>
           <a:lstStyle/>
           <a:p>
-            <a:pPr>
-              <a:spcAft>
-                <a:spcPts val="1000"/>
-              </a:spcAft>
+            <a:pPr lvl="0" marL="457200" indent="-228600">
+              <a:buFont typeface="Calibri"/>
+              <a:spcAft>
+                <a:spcPts val="1000"/>
+              </a:spcAft>
+              <a:buSzPct val="100000"/>
               <a:buChar char="•"/>
               <a:lnSpc>
                 <a:spcPts val="2200"/>
@@ -24721,10 +25179,12 @@
             </a:r>
           </a:p>
           <a:p>
-            <a:pPr>
-              <a:spcAft>
-                <a:spcPts val="1000"/>
-              </a:spcAft>
+            <a:pPr lvl="0" marL="457200" indent="-228600">
+              <a:buFont typeface="Calibri"/>
+              <a:spcAft>
+                <a:spcPts val="1000"/>
+              </a:spcAft>
+              <a:buSzPct val="100000"/>
               <a:buChar char="•"/>
               <a:lnSpc>
                 <a:spcPts val="2200"/>
@@ -24860,10 +25320,12 @@
           </a:bodyPr>
           <a:lstStyle/>
           <a:p>
-            <a:pPr>
-              <a:spcAft>
-                <a:spcPts val="1000"/>
-              </a:spcAft>
+            <a:pPr lvl="0" marL="457200" indent="-228600">
+              <a:buFont typeface="Calibri"/>
+              <a:spcAft>
+                <a:spcPts val="1000"/>
+              </a:spcAft>
+              <a:buSzPct val="100000"/>
               <a:buChar char="•"/>
               <a:lnSpc>
                 <a:spcPts val="2200"/>
@@ -24880,10 +25342,12 @@
             </a:r>
           </a:p>
           <a:p>
-            <a:pPr>
-              <a:spcAft>
-                <a:spcPts val="1000"/>
-              </a:spcAft>
+            <a:pPr lvl="0" marL="457200" indent="-228600">
+              <a:buFont typeface="Calibri"/>
+              <a:spcAft>
+                <a:spcPts val="1000"/>
+              </a:spcAft>
+              <a:buSzPct val="100000"/>
               <a:buChar char="•"/>
               <a:lnSpc>
                 <a:spcPts val="2200"/>
@@ -25019,10 +25483,12 @@
           </a:bodyPr>
           <a:lstStyle/>
           <a:p>
-            <a:pPr>
-              <a:spcAft>
-                <a:spcPts val="1000"/>
-              </a:spcAft>
+            <a:pPr lvl="0" marL="457200" indent="-228600">
+              <a:buFont typeface="Calibri"/>
+              <a:spcAft>
+                <a:spcPts val="1000"/>
+              </a:spcAft>
+              <a:buSzPct val="100000"/>
               <a:buChar char="•"/>
               <a:lnSpc>
                 <a:spcPts val="2200"/>
@@ -25039,10 +25505,12 @@
             </a:r>
           </a:p>
           <a:p>
-            <a:pPr>
-              <a:spcAft>
-                <a:spcPts val="1000"/>
-              </a:spcAft>
+            <a:pPr lvl="0" marL="457200" indent="-228600">
+              <a:buFont typeface="Calibri"/>
+              <a:spcAft>
+                <a:spcPts val="1000"/>
+              </a:spcAft>
+              <a:buSzPct val="100000"/>
               <a:buChar char="•"/>
               <a:lnSpc>
                 <a:spcPts val="2200"/>
@@ -25059,10 +25527,12 @@
             </a:r>
           </a:p>
           <a:p>
-            <a:pPr>
-              <a:spcAft>
-                <a:spcPts val="1000"/>
-              </a:spcAft>
+            <a:pPr lvl="0" marL="457200" indent="-228600">
+              <a:buFont typeface="Calibri"/>
+              <a:spcAft>
+                <a:spcPts val="1000"/>
+              </a:spcAft>
+              <a:buSzPct val="100000"/>
               <a:buChar char="•"/>
               <a:lnSpc>
                 <a:spcPts val="2200"/>
@@ -25198,10 +25668,12 @@
           </a:bodyPr>
           <a:lstStyle/>
           <a:p>
-            <a:pPr>
-              <a:spcAft>
-                <a:spcPts val="1000"/>
-              </a:spcAft>
+            <a:pPr lvl="0" marL="457200" indent="-228600">
+              <a:buFont typeface="Calibri"/>
+              <a:spcAft>
+                <a:spcPts val="1000"/>
+              </a:spcAft>
+              <a:buSzPct val="100000"/>
               <a:buChar char="•"/>
               <a:lnSpc>
                 <a:spcPts val="2200"/>
@@ -25218,10 +25690,12 @@
             </a:r>
           </a:p>
           <a:p>
-            <a:pPr>
-              <a:spcAft>
-                <a:spcPts val="1000"/>
-              </a:spcAft>
+            <a:pPr lvl="0" marL="457200" indent="-228600">
+              <a:buFont typeface="Calibri"/>
+              <a:spcAft>
+                <a:spcPts val="1000"/>
+              </a:spcAft>
+              <a:buSzPct val="100000"/>
               <a:buChar char="•"/>
               <a:lnSpc>
                 <a:spcPts val="2200"/>
@@ -25238,10 +25712,12 @@
             </a:r>
           </a:p>
           <a:p>
-            <a:pPr>
-              <a:spcAft>
-                <a:spcPts val="1000"/>
-              </a:spcAft>
+            <a:pPr lvl="0" marL="457200" indent="-228600">
+              <a:buFont typeface="Calibri"/>
+              <a:spcAft>
+                <a:spcPts val="1000"/>
+              </a:spcAft>
+              <a:buSzPct val="100000"/>
               <a:buChar char="•"/>
               <a:lnSpc>
                 <a:spcPts val="2200"/>
@@ -25377,10 +25853,12 @@
           </a:bodyPr>
           <a:lstStyle/>
           <a:p>
-            <a:pPr>
-              <a:spcAft>
-                <a:spcPts val="1000"/>
-              </a:spcAft>
+            <a:pPr lvl="0" marL="457200" indent="-228600">
+              <a:buFont typeface="Calibri"/>
+              <a:spcAft>
+                <a:spcPts val="1000"/>
+              </a:spcAft>
+              <a:buSzPct val="100000"/>
               <a:buChar char="•"/>
               <a:lnSpc>
                 <a:spcPts val="2200"/>
@@ -25397,10 +25875,12 @@
             </a:r>
           </a:p>
           <a:p>
-            <a:pPr>
-              <a:spcAft>
-                <a:spcPts val="1000"/>
-              </a:spcAft>
+            <a:pPr lvl="0" marL="457200" indent="-228600">
+              <a:buFont typeface="Calibri"/>
+              <a:spcAft>
+                <a:spcPts val="1000"/>
+              </a:spcAft>
+              <a:buSzPct val="100000"/>
               <a:buChar char="•"/>
               <a:lnSpc>
                 <a:spcPts val="2200"/>
@@ -25417,10 +25897,12 @@
             </a:r>
           </a:p>
           <a:p>
-            <a:pPr>
-              <a:spcAft>
-                <a:spcPts val="1000"/>
-              </a:spcAft>
+            <a:pPr lvl="0" marL="457200" indent="-228600">
+              <a:buFont typeface="Calibri"/>
+              <a:spcAft>
+                <a:spcPts val="1000"/>
+              </a:spcAft>
+              <a:buSzPct val="100000"/>
               <a:buChar char="•"/>
               <a:lnSpc>
                 <a:spcPts val="2200"/>
@@ -25556,10 +26038,12 @@
           </a:bodyPr>
           <a:lstStyle/>
           <a:p>
-            <a:pPr>
-              <a:spcAft>
-                <a:spcPts val="1000"/>
-              </a:spcAft>
+            <a:pPr lvl="0" marL="457200" indent="-228600">
+              <a:buFont typeface="Calibri"/>
+              <a:spcAft>
+                <a:spcPts val="1000"/>
+              </a:spcAft>
+              <a:buSzPct val="100000"/>
               <a:buChar char="•"/>
               <a:lnSpc>
                 <a:spcPts val="2200"/>
@@ -25576,10 +26060,12 @@
             </a:r>
           </a:p>
           <a:p>
-            <a:pPr>
-              <a:spcAft>
-                <a:spcPts val="1000"/>
-              </a:spcAft>
+            <a:pPr lvl="0" marL="457200" indent="-228600">
+              <a:buFont typeface="Calibri"/>
+              <a:spcAft>
+                <a:spcPts val="1000"/>
+              </a:spcAft>
+              <a:buSzPct val="100000"/>
               <a:buChar char="•"/>
               <a:lnSpc>
                 <a:spcPts val="2200"/>
@@ -25596,10 +26082,12 @@
             </a:r>
           </a:p>
           <a:p>
-            <a:pPr>
-              <a:spcAft>
-                <a:spcPts val="1000"/>
-              </a:spcAft>
+            <a:pPr lvl="0" marL="457200" indent="-228600">
+              <a:buFont typeface="Calibri"/>
+              <a:spcAft>
+                <a:spcPts val="1000"/>
+              </a:spcAft>
+              <a:buSzPct val="100000"/>
               <a:buChar char="•"/>
               <a:lnSpc>
                 <a:spcPts val="2200"/>
@@ -25616,10 +26104,12 @@
             </a:r>
           </a:p>
           <a:p>
-            <a:pPr>
-              <a:spcAft>
-                <a:spcPts val="1000"/>
-              </a:spcAft>
+            <a:pPr lvl="0" marL="457200" indent="-228600">
+              <a:buFont typeface="Calibri"/>
+              <a:spcAft>
+                <a:spcPts val="1000"/>
+              </a:spcAft>
+              <a:buSzPct val="100000"/>
               <a:buChar char="•"/>
               <a:lnSpc>
                 <a:spcPts val="2200"/>
@@ -25755,10 +26245,12 @@
           </a:bodyPr>
           <a:lstStyle/>
           <a:p>
-            <a:pPr>
-              <a:spcAft>
-                <a:spcPts val="1000"/>
-              </a:spcAft>
+            <a:pPr lvl="0" marL="457200" indent="-228600">
+              <a:buFont typeface="Calibri"/>
+              <a:spcAft>
+                <a:spcPts val="1000"/>
+              </a:spcAft>
+              <a:buSzPct val="100000"/>
               <a:buChar char="•"/>
               <a:lnSpc>
                 <a:spcPts val="2200"/>
@@ -25775,10 +26267,12 @@
             </a:r>
           </a:p>
           <a:p>
-            <a:pPr>
-              <a:spcAft>
-                <a:spcPts val="1000"/>
-              </a:spcAft>
+            <a:pPr lvl="0" marL="457200" indent="-228600">
+              <a:buFont typeface="Calibri"/>
+              <a:spcAft>
+                <a:spcPts val="1000"/>
+              </a:spcAft>
+              <a:buSzPct val="100000"/>
               <a:buChar char="•"/>
               <a:lnSpc>
                 <a:spcPts val="2200"/>
@@ -25914,10 +26408,12 @@
           </a:bodyPr>
           <a:lstStyle/>
           <a:p>
-            <a:pPr>
-              <a:spcAft>
-                <a:spcPts val="1000"/>
-              </a:spcAft>
+            <a:pPr lvl="0" marL="457200" indent="-228600">
+              <a:buFont typeface="Calibri"/>
+              <a:spcAft>
+                <a:spcPts val="1000"/>
+              </a:spcAft>
+              <a:buSzPct val="100000"/>
               <a:buChar char="•"/>
               <a:lnSpc>
                 <a:spcPts val="2200"/>
@@ -25934,10 +26430,12 @@
             </a:r>
           </a:p>
           <a:p>
-            <a:pPr>
-              <a:spcAft>
-                <a:spcPts val="1000"/>
-              </a:spcAft>
+            <a:pPr lvl="0" marL="457200" indent="-228600">
+              <a:buFont typeface="Calibri"/>
+              <a:spcAft>
+                <a:spcPts val="1000"/>
+              </a:spcAft>
+              <a:buSzPct val="100000"/>
               <a:buChar char="•"/>
               <a:lnSpc>
                 <a:spcPts val="2200"/>
@@ -25954,10 +26452,12 @@
             </a:r>
           </a:p>
           <a:p>
-            <a:pPr>
-              <a:spcAft>
-                <a:spcPts val="1000"/>
-              </a:spcAft>
+            <a:pPr lvl="0" marL="457200" indent="-228600">
+              <a:buFont typeface="Calibri"/>
+              <a:spcAft>
+                <a:spcPts val="1000"/>
+              </a:spcAft>
+              <a:buSzPct val="100000"/>
               <a:buChar char="•"/>
               <a:lnSpc>
                 <a:spcPts val="2200"/>
@@ -26093,10 +26593,12 @@
           </a:bodyPr>
           <a:lstStyle/>
           <a:p>
-            <a:pPr>
-              <a:spcAft>
-                <a:spcPts val="1000"/>
-              </a:spcAft>
+            <a:pPr lvl="0" marL="457200" indent="-228600">
+              <a:buFont typeface="Calibri"/>
+              <a:spcAft>
+                <a:spcPts val="1000"/>
+              </a:spcAft>
+              <a:buSzPct val="100000"/>
               <a:buChar char="•"/>
               <a:lnSpc>
                 <a:spcPts val="2200"/>
@@ -26113,10 +26615,12 @@
             </a:r>
           </a:p>
           <a:p>
-            <a:pPr>
-              <a:spcAft>
-                <a:spcPts val="1000"/>
-              </a:spcAft>
+            <a:pPr lvl="0" marL="457200" indent="-228600">
+              <a:buFont typeface="Calibri"/>
+              <a:spcAft>
+                <a:spcPts val="1000"/>
+              </a:spcAft>
+              <a:buSzPct val="100000"/>
               <a:buChar char="•"/>
               <a:lnSpc>
                 <a:spcPts val="2200"/>
@@ -26252,10 +26756,12 @@
           </a:bodyPr>
           <a:lstStyle/>
           <a:p>
-            <a:pPr>
-              <a:spcAft>
-                <a:spcPts val="1000"/>
-              </a:spcAft>
+            <a:pPr lvl="0" marL="457200" indent="-228600">
+              <a:buFont typeface="Calibri"/>
+              <a:spcAft>
+                <a:spcPts val="1000"/>
+              </a:spcAft>
+              <a:buSzPct val="100000"/>
               <a:buChar char="•"/>
               <a:lnSpc>
                 <a:spcPts val="2200"/>
@@ -26272,10 +26778,12 @@
             </a:r>
           </a:p>
           <a:p>
-            <a:pPr>
-              <a:spcAft>
-                <a:spcPts val="1000"/>
-              </a:spcAft>
+            <a:pPr lvl="0" marL="457200" indent="-228600">
+              <a:buFont typeface="Calibri"/>
+              <a:spcAft>
+                <a:spcPts val="1000"/>
+              </a:spcAft>
+              <a:buSzPct val="100000"/>
               <a:buChar char="•"/>
               <a:lnSpc>
                 <a:spcPts val="2200"/>
@@ -26411,10 +26919,12 @@
           </a:bodyPr>
           <a:lstStyle/>
           <a:p>
-            <a:pPr>
-              <a:spcAft>
-                <a:spcPts val="1000"/>
-              </a:spcAft>
+            <a:pPr lvl="0" marL="457200" indent="-228600">
+              <a:buFont typeface="Calibri"/>
+              <a:spcAft>
+                <a:spcPts val="1000"/>
+              </a:spcAft>
+              <a:buSzPct val="100000"/>
               <a:buChar char="•"/>
               <a:lnSpc>
                 <a:spcPts val="2200"/>
@@ -26431,10 +26941,12 @@
             </a:r>
           </a:p>
           <a:p>
-            <a:pPr>
-              <a:spcAft>
-                <a:spcPts val="1000"/>
-              </a:spcAft>
+            <a:pPr lvl="0" marL="457200" indent="-228600">
+              <a:buFont typeface="Calibri"/>
+              <a:spcAft>
+                <a:spcPts val="1000"/>
+              </a:spcAft>
+              <a:buSzPct val="100000"/>
               <a:buChar char="•"/>
               <a:lnSpc>
                 <a:spcPts val="2200"/>
@@ -26451,10 +26963,12 @@
             </a:r>
           </a:p>
           <a:p>
-            <a:pPr>
-              <a:spcAft>
-                <a:spcPts val="1000"/>
-              </a:spcAft>
+            <a:pPr lvl="0" marL="457200" indent="-228600">
+              <a:buFont typeface="Calibri"/>
+              <a:spcAft>
+                <a:spcPts val="1000"/>
+              </a:spcAft>
+              <a:buSzPct val="100000"/>
               <a:buChar char="•"/>
               <a:lnSpc>
                 <a:spcPts val="2200"/>
@@ -26590,10 +27104,12 @@
           </a:bodyPr>
           <a:lstStyle/>
           <a:p>
-            <a:pPr>
-              <a:spcAft>
-                <a:spcPts val="1000"/>
-              </a:spcAft>
+            <a:pPr lvl="0" marL="457200" indent="-228600">
+              <a:buFont typeface="Calibri"/>
+              <a:spcAft>
+                <a:spcPts val="1000"/>
+              </a:spcAft>
+              <a:buSzPct val="100000"/>
               <a:buChar char="•"/>
               <a:lnSpc>
                 <a:spcPts val="2200"/>
@@ -26610,10 +27126,12 @@
             </a:r>
           </a:p>
           <a:p>
-            <a:pPr>
-              <a:spcAft>
-                <a:spcPts val="1000"/>
-              </a:spcAft>
+            <a:pPr lvl="0" marL="457200" indent="-228600">
+              <a:buFont typeface="Calibri"/>
+              <a:spcAft>
+                <a:spcPts val="1000"/>
+              </a:spcAft>
+              <a:buSzPct val="100000"/>
               <a:buChar char="•"/>
               <a:lnSpc>
                 <a:spcPts val="2200"/>
@@ -26630,10 +27148,12 @@
             </a:r>
           </a:p>
           <a:p>
-            <a:pPr>
-              <a:spcAft>
-                <a:spcPts val="1000"/>
-              </a:spcAft>
+            <a:pPr lvl="0" marL="457200" indent="-228600">
+              <a:buFont typeface="Calibri"/>
+              <a:spcAft>
+                <a:spcPts val="1000"/>
+              </a:spcAft>
+              <a:buSzPct val="100000"/>
               <a:buChar char="•"/>
               <a:lnSpc>
                 <a:spcPts val="2200"/>
@@ -26650,10 +27170,12 @@
             </a:r>
           </a:p>
           <a:p>
-            <a:pPr>
-              <a:spcAft>
-                <a:spcPts val="1000"/>
-              </a:spcAft>
+            <a:pPr lvl="0" marL="457200" indent="-228600">
+              <a:buFont typeface="Calibri"/>
+              <a:spcAft>
+                <a:spcPts val="1000"/>
+              </a:spcAft>
+              <a:buSzPct val="100000"/>
               <a:buChar char="•"/>
               <a:lnSpc>
                 <a:spcPts val="2200"/>
@@ -26670,10 +27192,12 @@
             </a:r>
           </a:p>
           <a:p>
-            <a:pPr>
-              <a:spcAft>
-                <a:spcPts val="1000"/>
-              </a:spcAft>
+            <a:pPr lvl="0" marL="457200" indent="-228600">
+              <a:buFont typeface="Calibri"/>
+              <a:spcAft>
+                <a:spcPts val="1000"/>
+              </a:spcAft>
+              <a:buSzPct val="100000"/>
               <a:buChar char="•"/>
               <a:lnSpc>
                 <a:spcPts val="2200"/>
@@ -26690,10 +27214,12 @@
             </a:r>
           </a:p>
           <a:p>
-            <a:pPr>
-              <a:spcAft>
-                <a:spcPts val="1000"/>
-              </a:spcAft>
+            <a:pPr lvl="0" marL="457200" indent="-228600">
+              <a:buFont typeface="Calibri"/>
+              <a:spcAft>
+                <a:spcPts val="1000"/>
+              </a:spcAft>
+              <a:buSzPct val="100000"/>
               <a:buChar char="•"/>
               <a:lnSpc>
                 <a:spcPts val="2200"/>
@@ -26829,10 +27355,12 @@
           </a:bodyPr>
           <a:lstStyle/>
           <a:p>
-            <a:pPr>
-              <a:spcAft>
-                <a:spcPts val="1000"/>
-              </a:spcAft>
+            <a:pPr lvl="0" marL="457200" indent="-228600">
+              <a:buFont typeface="Calibri"/>
+              <a:spcAft>
+                <a:spcPts val="1000"/>
+              </a:spcAft>
+              <a:buSzPct val="100000"/>
               <a:buChar char="•"/>
               <a:lnSpc>
                 <a:spcPts val="2200"/>
@@ -26849,10 +27377,12 @@
             </a:r>
           </a:p>
           <a:p>
-            <a:pPr>
-              <a:spcAft>
-                <a:spcPts val="1000"/>
-              </a:spcAft>
+            <a:pPr lvl="0" marL="457200" indent="-228600">
+              <a:buFont typeface="Calibri"/>
+              <a:spcAft>
+                <a:spcPts val="1000"/>
+              </a:spcAft>
+              <a:buSzPct val="100000"/>
               <a:buChar char="•"/>
               <a:lnSpc>
                 <a:spcPts val="2200"/>
@@ -26869,10 +27399,12 @@
             </a:r>
           </a:p>
           <a:p>
-            <a:pPr>
-              <a:spcAft>
-                <a:spcPts val="1000"/>
-              </a:spcAft>
+            <a:pPr lvl="0" marL="457200" indent="-228600">
+              <a:buFont typeface="Calibri"/>
+              <a:spcAft>
+                <a:spcPts val="1000"/>
+              </a:spcAft>
+              <a:buSzPct val="100000"/>
               <a:buChar char="•"/>
               <a:lnSpc>
                 <a:spcPts val="2200"/>
@@ -26889,10 +27421,12 @@
             </a:r>
           </a:p>
           <a:p>
-            <a:pPr>
-              <a:spcAft>
-                <a:spcPts val="1000"/>
-              </a:spcAft>
+            <a:pPr lvl="0" marL="457200" indent="-228600">
+              <a:buFont typeface="Calibri"/>
+              <a:spcAft>
+                <a:spcPts val="1000"/>
+              </a:spcAft>
+              <a:buSzPct val="100000"/>
               <a:buChar char="•"/>
               <a:lnSpc>
                 <a:spcPts val="2200"/>
@@ -27028,10 +27562,12 @@
           </a:bodyPr>
           <a:lstStyle/>
           <a:p>
-            <a:pPr>
-              <a:spcAft>
-                <a:spcPts val="1000"/>
-              </a:spcAft>
+            <a:pPr lvl="0" marL="457200" indent="-228600">
+              <a:buFont typeface="Calibri"/>
+              <a:spcAft>
+                <a:spcPts val="1000"/>
+              </a:spcAft>
+              <a:buSzPct val="100000"/>
               <a:buChar char="•"/>
               <a:lnSpc>
                 <a:spcPts val="2200"/>
@@ -27048,10 +27584,12 @@
             </a:r>
           </a:p>
           <a:p>
-            <a:pPr>
-              <a:spcAft>
-                <a:spcPts val="1000"/>
-              </a:spcAft>
+            <a:pPr lvl="0" marL="457200" indent="-228600">
+              <a:buFont typeface="Calibri"/>
+              <a:spcAft>
+                <a:spcPts val="1000"/>
+              </a:spcAft>
+              <a:buSzPct val="100000"/>
               <a:buChar char="•"/>
               <a:lnSpc>
                 <a:spcPts val="2200"/>
@@ -27068,10 +27606,12 @@
             </a:r>
           </a:p>
           <a:p>
-            <a:pPr>
-              <a:spcAft>
-                <a:spcPts val="1000"/>
-              </a:spcAft>
+            <a:pPr lvl="0" marL="457200" indent="-228600">
+              <a:buFont typeface="Calibri"/>
+              <a:spcAft>
+                <a:spcPts val="1000"/>
+              </a:spcAft>
+              <a:buSzPct val="100000"/>
               <a:buChar char="•"/>
               <a:lnSpc>
                 <a:spcPts val="2200"/>
@@ -27088,10 +27628,12 @@
             </a:r>
           </a:p>
           <a:p>
-            <a:pPr>
-              <a:spcAft>
-                <a:spcPts val="1000"/>
-              </a:spcAft>
+            <a:pPr lvl="0" marL="457200" indent="-228600">
+              <a:buFont typeface="Calibri"/>
+              <a:spcAft>
+                <a:spcPts val="1000"/>
+              </a:spcAft>
+              <a:buSzPct val="100000"/>
               <a:buChar char="•"/>
               <a:lnSpc>
                 <a:spcPts val="2200"/>
@@ -27108,10 +27650,12 @@
             </a:r>
           </a:p>
           <a:p>
-            <a:pPr>
-              <a:spcAft>
-                <a:spcPts val="1000"/>
-              </a:spcAft>
+            <a:pPr lvl="0" marL="457200" indent="-228600">
+              <a:buFont typeface="Calibri"/>
+              <a:spcAft>
+                <a:spcPts val="1000"/>
+              </a:spcAft>
+              <a:buSzPct val="100000"/>
               <a:buChar char="•"/>
               <a:lnSpc>
                 <a:spcPts val="2200"/>
@@ -27247,10 +27791,12 @@
           </a:bodyPr>
           <a:lstStyle/>
           <a:p>
-            <a:pPr>
-              <a:spcAft>
-                <a:spcPts val="1000"/>
-              </a:spcAft>
+            <a:pPr lvl="0" marL="457200" indent="-228600">
+              <a:buFont typeface="Calibri"/>
+              <a:spcAft>
+                <a:spcPts val="1000"/>
+              </a:spcAft>
+              <a:buSzPct val="100000"/>
               <a:buChar char="•"/>
               <a:lnSpc>
                 <a:spcPts val="2200"/>
@@ -27267,10 +27813,12 @@
             </a:r>
           </a:p>
           <a:p>
-            <a:pPr>
-              <a:spcAft>
-                <a:spcPts val="1000"/>
-              </a:spcAft>
+            <a:pPr lvl="0" marL="457200" indent="-228600">
+              <a:buFont typeface="Calibri"/>
+              <a:spcAft>
+                <a:spcPts val="1000"/>
+              </a:spcAft>
+              <a:buSzPct val="100000"/>
               <a:buChar char="•"/>
               <a:lnSpc>
                 <a:spcPts val="2200"/>
@@ -27287,10 +27835,12 @@
             </a:r>
           </a:p>
           <a:p>
-            <a:pPr>
-              <a:spcAft>
-                <a:spcPts val="1000"/>
-              </a:spcAft>
+            <a:pPr lvl="0" marL="457200" indent="-228600">
+              <a:buFont typeface="Calibri"/>
+              <a:spcAft>
+                <a:spcPts val="1000"/>
+              </a:spcAft>
+              <a:buSzPct val="100000"/>
               <a:buChar char="•"/>
               <a:lnSpc>
                 <a:spcPts val="2200"/>
@@ -27307,10 +27857,12 @@
             </a:r>
           </a:p>
           <a:p>
-            <a:pPr>
-              <a:spcAft>
-                <a:spcPts val="1000"/>
-              </a:spcAft>
+            <a:pPr lvl="0" marL="457200" indent="-228600">
+              <a:buFont typeface="Calibri"/>
+              <a:spcAft>
+                <a:spcPts val="1000"/>
+              </a:spcAft>
+              <a:buSzPct val="100000"/>
               <a:buChar char="•"/>
               <a:lnSpc>
                 <a:spcPts val="2200"/>
@@ -27327,10 +27879,12 @@
             </a:r>
           </a:p>
           <a:p>
-            <a:pPr>
-              <a:spcAft>
-                <a:spcPts val="1000"/>
-              </a:spcAft>
+            <a:pPr lvl="0" marL="457200" indent="-228600">
+              <a:buFont typeface="Calibri"/>
+              <a:spcAft>
+                <a:spcPts val="1000"/>
+              </a:spcAft>
+              <a:buSzPct val="100000"/>
               <a:buChar char="•"/>
               <a:lnSpc>
                 <a:spcPts val="2200"/>
@@ -27347,10 +27901,12 @@
             </a:r>
           </a:p>
           <a:p>
-            <a:pPr>
-              <a:spcAft>
-                <a:spcPts val="1000"/>
-              </a:spcAft>
+            <a:pPr lvl="0" marL="457200" indent="-228600">
+              <a:buFont typeface="Calibri"/>
+              <a:spcAft>
+                <a:spcPts val="1000"/>
+              </a:spcAft>
+              <a:buSzPct val="100000"/>
               <a:buChar char="•"/>
               <a:lnSpc>
                 <a:spcPts val="2200"/>
@@ -27486,10 +28042,12 @@
           </a:bodyPr>
           <a:lstStyle/>
           <a:p>
-            <a:pPr>
-              <a:spcAft>
-                <a:spcPts val="1000"/>
-              </a:spcAft>
+            <a:pPr lvl="0" marL="457200" indent="-228600">
+              <a:buFont typeface="Calibri"/>
+              <a:spcAft>
+                <a:spcPts val="1000"/>
+              </a:spcAft>
+              <a:buSzPct val="100000"/>
               <a:buChar char="•"/>
               <a:lnSpc>
                 <a:spcPts val="2200"/>
@@ -27506,10 +28064,12 @@
             </a:r>
           </a:p>
           <a:p>
-            <a:pPr>
-              <a:spcAft>
-                <a:spcPts val="1000"/>
-              </a:spcAft>
+            <a:pPr lvl="0" marL="457200" indent="-228600">
+              <a:buFont typeface="Calibri"/>
+              <a:spcAft>
+                <a:spcPts val="1000"/>
+              </a:spcAft>
+              <a:buSzPct val="100000"/>
               <a:buChar char="•"/>
               <a:lnSpc>
                 <a:spcPts val="2200"/>
@@ -27526,10 +28086,12 @@
             </a:r>
           </a:p>
           <a:p>
-            <a:pPr>
-              <a:spcAft>
-                <a:spcPts val="1000"/>
-              </a:spcAft>
+            <a:pPr lvl="0" marL="457200" indent="-228600">
+              <a:buFont typeface="Calibri"/>
+              <a:spcAft>
+                <a:spcPts val="1000"/>
+              </a:spcAft>
+              <a:buSzPct val="100000"/>
               <a:buChar char="•"/>
               <a:lnSpc>
                 <a:spcPts val="2200"/>
@@ -27665,10 +28227,12 @@
           </a:bodyPr>
           <a:lstStyle/>
           <a:p>
-            <a:pPr>
-              <a:spcAft>
-                <a:spcPts val="1000"/>
-              </a:spcAft>
+            <a:pPr lvl="0" marL="457200" indent="-228600">
+              <a:buFont typeface="Calibri"/>
+              <a:spcAft>
+                <a:spcPts val="1000"/>
+              </a:spcAft>
+              <a:buSzPct val="100000"/>
               <a:buChar char="•"/>
               <a:lnSpc>
                 <a:spcPts val="2200"/>
@@ -27685,10 +28249,12 @@
             </a:r>
           </a:p>
           <a:p>
-            <a:pPr>
-              <a:spcAft>
-                <a:spcPts val="1000"/>
-              </a:spcAft>
+            <a:pPr lvl="0" marL="457200" indent="-228600">
+              <a:buFont typeface="Calibri"/>
+              <a:spcAft>
+                <a:spcPts val="1000"/>
+              </a:spcAft>
+              <a:buSzPct val="100000"/>
               <a:buChar char="•"/>
               <a:lnSpc>
                 <a:spcPts val="2200"/>
@@ -27705,10 +28271,12 @@
             </a:r>
           </a:p>
           <a:p>
-            <a:pPr>
-              <a:spcAft>
-                <a:spcPts val="1000"/>
-              </a:spcAft>
+            <a:pPr lvl="0" marL="457200" indent="-228600">
+              <a:buFont typeface="Calibri"/>
+              <a:spcAft>
+                <a:spcPts val="1000"/>
+              </a:spcAft>
+              <a:buSzPct val="100000"/>
               <a:buChar char="•"/>
               <a:lnSpc>
                 <a:spcPts val="2200"/>
@@ -27844,10 +28412,12 @@
           </a:bodyPr>
           <a:lstStyle/>
           <a:p>
-            <a:pPr>
-              <a:spcAft>
-                <a:spcPts val="1000"/>
-              </a:spcAft>
+            <a:pPr lvl="0" marL="457200" indent="-228600">
+              <a:buFont typeface="Calibri"/>
+              <a:spcAft>
+                <a:spcPts val="1000"/>
+              </a:spcAft>
+              <a:buSzPct val="100000"/>
               <a:buChar char="•"/>
               <a:lnSpc>
                 <a:spcPts val="2200"/>
@@ -27864,10 +28434,12 @@
             </a:r>
           </a:p>
           <a:p>
-            <a:pPr>
-              <a:spcAft>
-                <a:spcPts val="1000"/>
-              </a:spcAft>
+            <a:pPr lvl="0" marL="457200" indent="-228600">
+              <a:buFont typeface="Calibri"/>
+              <a:spcAft>
+                <a:spcPts val="1000"/>
+              </a:spcAft>
+              <a:buSzPct val="100000"/>
               <a:buChar char="•"/>
               <a:lnSpc>
                 <a:spcPts val="2200"/>
@@ -28003,10 +28575,12 @@
           </a:bodyPr>
           <a:lstStyle/>
           <a:p>
-            <a:pPr>
-              <a:spcAft>
-                <a:spcPts val="1000"/>
-              </a:spcAft>
+            <a:pPr lvl="0" marL="457200" indent="-228600">
+              <a:buFont typeface="Calibri"/>
+              <a:spcAft>
+                <a:spcPts val="1000"/>
+              </a:spcAft>
+              <a:buSzPct val="100000"/>
               <a:buChar char="•"/>
               <a:lnSpc>
                 <a:spcPts val="2200"/>
@@ -28023,10 +28597,12 @@
             </a:r>
           </a:p>
           <a:p>
-            <a:pPr>
-              <a:spcAft>
-                <a:spcPts val="1000"/>
-              </a:spcAft>
+            <a:pPr lvl="0" marL="457200" indent="-228600">
+              <a:buFont typeface="Calibri"/>
+              <a:spcAft>
+                <a:spcPts val="1000"/>
+              </a:spcAft>
+              <a:buSzPct val="100000"/>
               <a:buChar char="•"/>
               <a:lnSpc>
                 <a:spcPts val="2200"/>
@@ -28162,10 +28738,12 @@
           </a:bodyPr>
           <a:lstStyle/>
           <a:p>
-            <a:pPr>
-              <a:spcAft>
-                <a:spcPts val="1000"/>
-              </a:spcAft>
+            <a:pPr lvl="0" marL="457200" indent="-228600">
+              <a:buFont typeface="Calibri"/>
+              <a:spcAft>
+                <a:spcPts val="1000"/>
+              </a:spcAft>
+              <a:buSzPct val="100000"/>
               <a:buChar char="•"/>
               <a:lnSpc>
                 <a:spcPts val="2200"/>
@@ -28182,10 +28760,12 @@
             </a:r>
           </a:p>
           <a:p>
-            <a:pPr>
-              <a:spcAft>
-                <a:spcPts val="1000"/>
-              </a:spcAft>
+            <a:pPr lvl="0" marL="457200" indent="-228600">
+              <a:buFont typeface="Calibri"/>
+              <a:spcAft>
+                <a:spcPts val="1000"/>
+              </a:spcAft>
+              <a:buSzPct val="100000"/>
               <a:buChar char="•"/>
               <a:lnSpc>
                 <a:spcPts val="2200"/>
@@ -28202,10 +28782,12 @@
             </a:r>
           </a:p>
           <a:p>
-            <a:pPr>
-              <a:spcAft>
-                <a:spcPts val="1000"/>
-              </a:spcAft>
+            <a:pPr lvl="0" marL="457200" indent="-228600">
+              <a:buFont typeface="Calibri"/>
+              <a:spcAft>
+                <a:spcPts val="1000"/>
+              </a:spcAft>
+              <a:buSzPct val="100000"/>
               <a:buChar char="•"/>
               <a:lnSpc>
                 <a:spcPts val="2200"/>
@@ -28222,10 +28804,12 @@
             </a:r>
           </a:p>
           <a:p>
-            <a:pPr>
-              <a:spcAft>
-                <a:spcPts val="1000"/>
-              </a:spcAft>
+            <a:pPr lvl="0" marL="457200" indent="-228600">
+              <a:buFont typeface="Calibri"/>
+              <a:spcAft>
+                <a:spcPts val="1000"/>
+              </a:spcAft>
+              <a:buSzPct val="100000"/>
               <a:buChar char="•"/>
               <a:lnSpc>
                 <a:spcPts val="2200"/>
@@ -28361,10 +28945,12 @@
           </a:bodyPr>
           <a:lstStyle/>
           <a:p>
-            <a:pPr>
-              <a:spcAft>
-                <a:spcPts val="1000"/>
-              </a:spcAft>
+            <a:pPr lvl="0" marL="457200" indent="-228600">
+              <a:buFont typeface="Calibri"/>
+              <a:spcAft>
+                <a:spcPts val="1000"/>
+              </a:spcAft>
+              <a:buSzPct val="100000"/>
               <a:buChar char="•"/>
               <a:lnSpc>
                 <a:spcPts val="2200"/>
@@ -28381,10 +28967,12 @@
             </a:r>
           </a:p>
           <a:p>
-            <a:pPr>
-              <a:spcAft>
-                <a:spcPts val="1000"/>
-              </a:spcAft>
+            <a:pPr lvl="0" marL="457200" indent="-228600">
+              <a:buFont typeface="Calibri"/>
+              <a:spcAft>
+                <a:spcPts val="1000"/>
+              </a:spcAft>
+              <a:buSzPct val="100000"/>
               <a:buChar char="•"/>
               <a:lnSpc>
                 <a:spcPts val="2200"/>
@@ -28401,10 +28989,12 @@
             </a:r>
           </a:p>
           <a:p>
-            <a:pPr>
-              <a:spcAft>
-                <a:spcPts val="1000"/>
-              </a:spcAft>
+            <a:pPr lvl="0" marL="457200" indent="-228600">
+              <a:buFont typeface="Calibri"/>
+              <a:spcAft>
+                <a:spcPts val="1000"/>
+              </a:spcAft>
+              <a:buSzPct val="100000"/>
               <a:buChar char="•"/>
               <a:lnSpc>
                 <a:spcPts val="2200"/>
@@ -28540,10 +29130,12 @@
           </a:bodyPr>
           <a:lstStyle/>
           <a:p>
-            <a:pPr>
-              <a:spcAft>
-                <a:spcPts val="1000"/>
-              </a:spcAft>
+            <a:pPr lvl="0" marL="457200" indent="-228600">
+              <a:buFont typeface="Calibri"/>
+              <a:spcAft>
+                <a:spcPts val="1000"/>
+              </a:spcAft>
+              <a:buSzPct val="100000"/>
               <a:buChar char="•"/>
               <a:lnSpc>
                 <a:spcPts val="2200"/>
@@ -28560,10 +29152,12 @@
             </a:r>
           </a:p>
           <a:p>
-            <a:pPr>
-              <a:spcAft>
-                <a:spcPts val="1000"/>
-              </a:spcAft>
+            <a:pPr lvl="0" marL="457200" indent="-228600">
+              <a:buFont typeface="Calibri"/>
+              <a:spcAft>
+                <a:spcPts val="1000"/>
+              </a:spcAft>
+              <a:buSzPct val="100000"/>
               <a:buChar char="•"/>
               <a:lnSpc>
                 <a:spcPts val="2200"/>
@@ -28580,10 +29174,12 @@
             </a:r>
           </a:p>
           <a:p>
-            <a:pPr>
-              <a:spcAft>
-                <a:spcPts val="1000"/>
-              </a:spcAft>
+            <a:pPr lvl="0" marL="457200" indent="-228600">
+              <a:buFont typeface="Calibri"/>
+              <a:spcAft>
+                <a:spcPts val="1000"/>
+              </a:spcAft>
+              <a:buSzPct val="100000"/>
               <a:buChar char="•"/>
               <a:lnSpc>
                 <a:spcPts val="2200"/>
@@ -28600,10 +29196,12 @@
             </a:r>
           </a:p>
           <a:p>
-            <a:pPr>
-              <a:spcAft>
-                <a:spcPts val="1000"/>
-              </a:spcAft>
+            <a:pPr lvl="0" marL="457200" indent="-228600">
+              <a:buFont typeface="Calibri"/>
+              <a:spcAft>
+                <a:spcPts val="1000"/>
+              </a:spcAft>
+              <a:buSzPct val="100000"/>
               <a:buChar char="•"/>
               <a:lnSpc>
                 <a:spcPts val="2200"/>
@@ -28739,10 +29337,12 @@
           </a:bodyPr>
           <a:lstStyle/>
           <a:p>
-            <a:pPr>
-              <a:spcAft>
-                <a:spcPts val="1000"/>
-              </a:spcAft>
+            <a:pPr lvl="0" marL="457200" indent="-228600">
+              <a:buFont typeface="Calibri"/>
+              <a:spcAft>
+                <a:spcPts val="1000"/>
+              </a:spcAft>
+              <a:buSzPct val="100000"/>
               <a:buChar char="•"/>
               <a:lnSpc>
                 <a:spcPts val="2200"/>
@@ -28759,10 +29359,12 @@
             </a:r>
           </a:p>
           <a:p>
-            <a:pPr>
-              <a:spcAft>
-                <a:spcPts val="1000"/>
-              </a:spcAft>
+            <a:pPr lvl="0" marL="457200" indent="-228600">
+              <a:buFont typeface="Calibri"/>
+              <a:spcAft>
+                <a:spcPts val="1000"/>
+              </a:spcAft>
+              <a:buSzPct val="100000"/>
               <a:buChar char="•"/>
               <a:lnSpc>
                 <a:spcPts val="2200"/>
@@ -28779,10 +29381,12 @@
             </a:r>
           </a:p>
           <a:p>
-            <a:pPr>
-              <a:spcAft>
-                <a:spcPts val="1000"/>
-              </a:spcAft>
+            <a:pPr lvl="0" marL="457200" indent="-228600">
+              <a:buFont typeface="Calibri"/>
+              <a:spcAft>
+                <a:spcPts val="1000"/>
+              </a:spcAft>
+              <a:buSzPct val="100000"/>
               <a:buChar char="•"/>
               <a:lnSpc>
                 <a:spcPts val="2200"/>
@@ -28799,10 +29403,12 @@
             </a:r>
           </a:p>
           <a:p>
-            <a:pPr>
-              <a:spcAft>
-                <a:spcPts val="1000"/>
-              </a:spcAft>
+            <a:pPr lvl="0" marL="457200" indent="-228600">
+              <a:buFont typeface="Calibri"/>
+              <a:spcAft>
+                <a:spcPts val="1000"/>
+              </a:spcAft>
+              <a:buSzPct val="100000"/>
               <a:buChar char="•"/>
               <a:lnSpc>
                 <a:spcPts val="2200"/>
@@ -28938,10 +29544,12 @@
           </a:bodyPr>
           <a:lstStyle/>
           <a:p>
-            <a:pPr>
-              <a:spcAft>
-                <a:spcPts val="1000"/>
-              </a:spcAft>
+            <a:pPr lvl="0" marL="457200" indent="-228600">
+              <a:buFont typeface="Calibri"/>
+              <a:spcAft>
+                <a:spcPts val="1000"/>
+              </a:spcAft>
+              <a:buSzPct val="100000"/>
               <a:buChar char="•"/>
               <a:lnSpc>
                 <a:spcPts val="2200"/>
@@ -28958,10 +29566,12 @@
             </a:r>
           </a:p>
           <a:p>
-            <a:pPr>
-              <a:spcAft>
-                <a:spcPts val="1000"/>
-              </a:spcAft>
+            <a:pPr lvl="0" marL="457200" indent="-228600">
+              <a:buFont typeface="Calibri"/>
+              <a:spcAft>
+                <a:spcPts val="1000"/>
+              </a:spcAft>
+              <a:buSzPct val="100000"/>
               <a:buChar char="•"/>
               <a:lnSpc>
                 <a:spcPts val="2200"/>
@@ -28978,10 +29588,12 @@
             </a:r>
           </a:p>
           <a:p>
-            <a:pPr>
-              <a:spcAft>
-                <a:spcPts val="1000"/>
-              </a:spcAft>
+            <a:pPr lvl="0" marL="457200" indent="-228600">
+              <a:buFont typeface="Calibri"/>
+              <a:spcAft>
+                <a:spcPts val="1000"/>
+              </a:spcAft>
+              <a:buSzPct val="100000"/>
               <a:buChar char="•"/>
               <a:lnSpc>
                 <a:spcPts val="2200"/>
@@ -28998,10 +29610,12 @@
             </a:r>
           </a:p>
           <a:p>
-            <a:pPr>
-              <a:spcAft>
-                <a:spcPts val="1000"/>
-              </a:spcAft>
+            <a:pPr lvl="0" marL="457200" indent="-228600">
+              <a:buFont typeface="Calibri"/>
+              <a:spcAft>
+                <a:spcPts val="1000"/>
+              </a:spcAft>
+              <a:buSzPct val="100000"/>
               <a:buChar char="•"/>
               <a:lnSpc>
                 <a:spcPts val="2200"/>
@@ -29562,10 +30176,12 @@
           </a:bodyPr>
           <a:lstStyle/>
           <a:p>
-            <a:pPr>
-              <a:spcAft>
-                <a:spcPts val="1000"/>
-              </a:spcAft>
+            <a:pPr lvl="0" marL="457200" indent="-228600">
+              <a:buFont typeface="Calibri"/>
+              <a:spcAft>
+                <a:spcPts val="1000"/>
+              </a:spcAft>
+              <a:buSzPct val="100000"/>
               <a:buChar char="•"/>
               <a:lnSpc>
                 <a:spcPts val="2200"/>
@@ -29582,10 +30198,12 @@
             </a:r>
           </a:p>
           <a:p>
-            <a:pPr>
-              <a:spcAft>
-                <a:spcPts val="1000"/>
-              </a:spcAft>
+            <a:pPr lvl="0" marL="457200" indent="-228600">
+              <a:buFont typeface="Calibri"/>
+              <a:spcAft>
+                <a:spcPts val="1000"/>
+              </a:spcAft>
+              <a:buSzPct val="100000"/>
               <a:buChar char="•"/>
               <a:lnSpc>
                 <a:spcPts val="2200"/>
@@ -29602,10 +30220,12 @@
             </a:r>
           </a:p>
           <a:p>
-            <a:pPr>
-              <a:spcAft>
-                <a:spcPts val="1000"/>
-              </a:spcAft>
+            <a:pPr lvl="0" marL="457200" indent="-228600">
+              <a:buFont typeface="Calibri"/>
+              <a:spcAft>
+                <a:spcPts val="1000"/>
+              </a:spcAft>
+              <a:buSzPct val="100000"/>
               <a:buChar char="•"/>
               <a:lnSpc>
                 <a:spcPts val="2200"/>
@@ -29741,10 +30361,12 @@
           </a:bodyPr>
           <a:lstStyle/>
           <a:p>
-            <a:pPr>
-              <a:spcAft>
-                <a:spcPts val="1000"/>
-              </a:spcAft>
+            <a:pPr lvl="0" marL="457200" indent="-228600">
+              <a:buFont typeface="Calibri"/>
+              <a:spcAft>
+                <a:spcPts val="1000"/>
+              </a:spcAft>
+              <a:buSzPct val="100000"/>
               <a:buChar char="•"/>
               <a:lnSpc>
                 <a:spcPts val="2200"/>
@@ -29761,10 +30383,12 @@
             </a:r>
           </a:p>
           <a:p>
-            <a:pPr>
-              <a:spcAft>
-                <a:spcPts val="1000"/>
-              </a:spcAft>
+            <a:pPr lvl="0" marL="457200" indent="-228600">
+              <a:buFont typeface="Calibri"/>
+              <a:spcAft>
+                <a:spcPts val="1000"/>
+              </a:spcAft>
+              <a:buSzPct val="100000"/>
               <a:buChar char="•"/>
               <a:lnSpc>
                 <a:spcPts val="2200"/>
@@ -29781,10 +30405,12 @@
             </a:r>
           </a:p>
           <a:p>
-            <a:pPr>
-              <a:spcAft>
-                <a:spcPts val="1000"/>
-              </a:spcAft>
+            <a:pPr lvl="0" marL="457200" indent="-228600">
+              <a:buFont typeface="Calibri"/>
+              <a:spcAft>
+                <a:spcPts val="1000"/>
+              </a:spcAft>
+              <a:buSzPct val="100000"/>
               <a:buChar char="•"/>
               <a:lnSpc>
                 <a:spcPts val="2200"/>
@@ -29920,10 +30546,12 @@
           </a:bodyPr>
           <a:lstStyle/>
           <a:p>
-            <a:pPr>
-              <a:spcAft>
-                <a:spcPts val="1000"/>
-              </a:spcAft>
+            <a:pPr lvl="0" marL="457200" indent="-228600">
+              <a:buFont typeface="Calibri"/>
+              <a:spcAft>
+                <a:spcPts val="1000"/>
+              </a:spcAft>
+              <a:buSzPct val="100000"/>
               <a:buChar char="•"/>
               <a:lnSpc>
                 <a:spcPts val="2200"/>
@@ -29940,10 +30568,12 @@
             </a:r>
           </a:p>
           <a:p>
-            <a:pPr>
-              <a:spcAft>
-                <a:spcPts val="1000"/>
-              </a:spcAft>
+            <a:pPr lvl="0" marL="457200" indent="-228600">
+              <a:buFont typeface="Calibri"/>
+              <a:spcAft>
+                <a:spcPts val="1000"/>
+              </a:spcAft>
+              <a:buSzPct val="100000"/>
               <a:buChar char="•"/>
               <a:lnSpc>
                 <a:spcPts val="2200"/>
@@ -30079,10 +30709,12 @@
           </a:bodyPr>
           <a:lstStyle/>
           <a:p>
-            <a:pPr>
-              <a:spcAft>
-                <a:spcPts val="1000"/>
-              </a:spcAft>
+            <a:pPr lvl="0" marL="457200" indent="-228600">
+              <a:buFont typeface="Calibri"/>
+              <a:spcAft>
+                <a:spcPts val="1000"/>
+              </a:spcAft>
+              <a:buSzPct val="100000"/>
               <a:buChar char="•"/>
               <a:lnSpc>
                 <a:spcPts val="2200"/>
@@ -30099,10 +30731,12 @@
             </a:r>
           </a:p>
           <a:p>
-            <a:pPr>
-              <a:spcAft>
-                <a:spcPts val="1000"/>
-              </a:spcAft>
+            <a:pPr lvl="0" marL="457200" indent="-228600">
+              <a:buFont typeface="Calibri"/>
+              <a:spcAft>
+                <a:spcPts val="1000"/>
+              </a:spcAft>
+              <a:buSzPct val="100000"/>
               <a:buChar char="•"/>
               <a:lnSpc>
                 <a:spcPts val="2200"/>
@@ -30238,10 +30872,12 @@
           </a:bodyPr>
           <a:lstStyle/>
           <a:p>
-            <a:pPr>
-              <a:spcAft>
-                <a:spcPts val="1000"/>
-              </a:spcAft>
+            <a:pPr lvl="0" marL="457200" indent="-228600">
+              <a:buFont typeface="Calibri"/>
+              <a:spcAft>
+                <a:spcPts val="1000"/>
+              </a:spcAft>
+              <a:buSzPct val="100000"/>
               <a:buChar char="•"/>
               <a:lnSpc>
                 <a:spcPts val="2200"/>
@@ -30258,10 +30894,12 @@
             </a:r>
           </a:p>
           <a:p>
-            <a:pPr>
-              <a:spcAft>
-                <a:spcPts val="1000"/>
-              </a:spcAft>
+            <a:pPr lvl="0" marL="457200" indent="-228600">
+              <a:buFont typeface="Calibri"/>
+              <a:spcAft>
+                <a:spcPts val="1000"/>
+              </a:spcAft>
+              <a:buSzPct val="100000"/>
               <a:buChar char="•"/>
               <a:lnSpc>
                 <a:spcPts val="2200"/>
@@ -30278,10 +30916,12 @@
             </a:r>
           </a:p>
           <a:p>
-            <a:pPr>
-              <a:spcAft>
-                <a:spcPts val="1000"/>
-              </a:spcAft>
+            <a:pPr lvl="0" marL="457200" indent="-228600">
+              <a:buFont typeface="Calibri"/>
+              <a:spcAft>
+                <a:spcPts val="1000"/>
+              </a:spcAft>
+              <a:buSzPct val="100000"/>
               <a:buChar char="•"/>
               <a:lnSpc>
                 <a:spcPts val="2200"/>
@@ -30417,10 +31057,12 @@
           </a:bodyPr>
           <a:lstStyle/>
           <a:p>
-            <a:pPr>
-              <a:spcAft>
-                <a:spcPts val="1000"/>
-              </a:spcAft>
+            <a:pPr lvl="0" marL="457200" indent="-228600">
+              <a:buFont typeface="Calibri"/>
+              <a:spcAft>
+                <a:spcPts val="1000"/>
+              </a:spcAft>
+              <a:buSzPct val="100000"/>
               <a:buChar char="•"/>
               <a:lnSpc>
                 <a:spcPts val="2200"/>
@@ -30437,10 +31079,12 @@
             </a:r>
           </a:p>
           <a:p>
-            <a:pPr>
-              <a:spcAft>
-                <a:spcPts val="1000"/>
-              </a:spcAft>
+            <a:pPr lvl="0" marL="457200" indent="-228600">
+              <a:buFont typeface="Calibri"/>
+              <a:spcAft>
+                <a:spcPts val="1000"/>
+              </a:spcAft>
+              <a:buSzPct val="100000"/>
               <a:buChar char="•"/>
               <a:lnSpc>
                 <a:spcPts val="2200"/>
@@ -30457,10 +31101,12 @@
             </a:r>
           </a:p>
           <a:p>
-            <a:pPr>
-              <a:spcAft>
-                <a:spcPts val="1000"/>
-              </a:spcAft>
+            <a:pPr lvl="0" marL="457200" indent="-228600">
+              <a:buFont typeface="Calibri"/>
+              <a:spcAft>
+                <a:spcPts val="1000"/>
+              </a:spcAft>
+              <a:buSzPct val="100000"/>
               <a:buChar char="•"/>
               <a:lnSpc>
                 <a:spcPts val="2200"/>
@@ -30477,10 +31123,12 @@
             </a:r>
           </a:p>
           <a:p>
-            <a:pPr>
-              <a:spcAft>
-                <a:spcPts val="1000"/>
-              </a:spcAft>
+            <a:pPr lvl="0" marL="457200" indent="-228600">
+              <a:buFont typeface="Calibri"/>
+              <a:spcAft>
+                <a:spcPts val="1000"/>
+              </a:spcAft>
+              <a:buSzPct val="100000"/>
               <a:buChar char="•"/>
               <a:lnSpc>
                 <a:spcPts val="2200"/>
